--- a/examples/yellow/business.pptx
+++ b/examples/yellow/business.pptx
@@ -10,10 +10,9 @@
     <p:sldId id="258" r:id="rId4"/>
     <p:sldId id="259" r:id="rId5"/>
     <p:sldId id="260" r:id="rId6"/>
-    <p:sldId id="261" r:id="rId7"/>
   </p:sldIdLst>
   <p:notesMasterIdLst>
-    <p:notesMasterId r:id="rId8"/>
+    <p:notesMasterId r:id="rId7"/>
   </p:notesMasterIdLst>
   <p:sldSz cx="12192000" cy="6858000"/>
   <p:notesSz cx="6858000" cy="12192000"/>
@@ -152,7 +151,7 @@
               <a:lstStyle/>
               <a:p>
                 <a:pPr>
-                  <a:defRPr b="0" i="0" strike="noStrike" sz="1600" u="none">
+                  <a:defRPr b="0" i="0" strike="noStrike" sz="1500" u="none">
                     <a:solidFill>
                       <a:srgbClr val="252621"/>
                     </a:solidFill>
@@ -169,6 +168,39 @@
             <c:showBubbleSize val="0"/>
             <c:showLeaderLines val="0"/>
           </c:dLbls>
+          <c:dPt>
+            <c:idx val="0"/>
+            <c:invertIfNegative val="0"/>
+            <c:bubble3D val="0"/>
+            <c:spPr>
+              <a:solidFill>
+                <a:srgbClr val="C69300"/>
+              </a:solidFill>
+              <a:effectLst/>
+            </c:spPr>
+          </c:dPt>
+          <c:dPt>
+            <c:idx val="1"/>
+            <c:invertIfNegative val="0"/>
+            <c:bubble3D val="0"/>
+            <c:spPr>
+              <a:solidFill>
+                <a:srgbClr val="252621"/>
+              </a:solidFill>
+              <a:effectLst/>
+            </c:spPr>
+          </c:dPt>
+          <c:dPt>
+            <c:idx val="2"/>
+            <c:invertIfNegative val="0"/>
+            <c:bubble3D val="0"/>
+            <c:spPr>
+              <a:solidFill>
+                <a:srgbClr val="252621"/>
+              </a:solidFill>
+              <a:effectLst/>
+            </c:spPr>
+          </c:dPt>
           <c:cat>
             <c:multiLvlStrRef>
               <c:f>Sheet1!$A$2:$A$4</c:f>
@@ -214,7 +246,7 @@
             <a:lstStyle/>
             <a:p>
               <a:pPr>
-                <a:defRPr b="0" i="0" strike="noStrike" sz="1600" u="none">
+                <a:defRPr b="0" i="0" strike="noStrike" sz="1500" u="none">
                   <a:solidFill>
                     <a:srgbClr val="252621"/>
                   </a:solidFill>
@@ -262,7 +294,7 @@
             <a:pPr>
               <a:defRPr sz="1400" b="0" i="0" u="none" strike="noStrike">
                 <a:solidFill>
-                  <a:srgbClr val="77796D"/>
+                  <a:srgbClr val="252621"/>
                 </a:solidFill>
                 <a:latin typeface="Arial"/>
               </a:defRPr>
@@ -285,17 +317,6 @@
         </c:scaling>
         <c:delete val="0"/>
         <c:axPos val="l"/>
-        <c:majorGridlines>
-          <c:spPr>
-            <a:ln w="12700" cap="flat">
-              <a:solidFill>
-                <a:srgbClr val="DDDFD5"/>
-              </a:solidFill>
-              <a:prstDash val="solid"/>
-              <a:round/>
-            </a:ln>
-          </c:spPr>
-        </c:majorGridlines>
         <c:numFmt formatCode="General" sourceLinked="0"/>
         <c:majorTickMark val="out"/>
         <c:minorTickMark val="none"/>
@@ -325,6 +346,7 @@
         <c:crossAx val="2094734554"/>
         <c:crosses val="autoZero"/>
         <c:crossBetween val="between"/>
+        <c:majorUnit val="5"/>
       </c:valAx>
       <c:spPr>
         <a:noFill/>
@@ -1121,94 +1143,6 @@
             <a:fld id="{F7021451-1387-4CA6-816F-3879F97B5CBC}" type="slidenum">
               <a:rPr lang="en-US"/>
               <a:t>5</a:t>
-            </a:fld>
-            <a:endParaRPr lang="en-US"/>
-          </a:p>
-        </p:txBody>
-      </p:sp>
-    </p:spTree>
-    <p:extLst>
-      <p:ext uri="{BB962C8B-B14F-4D97-AF65-F5344CB8AC3E}">
-        <p14:creationId xmlns:p14="http://schemas.microsoft.com/office/powerpoint/2010/main" val="1024086991"/>
-      </p:ext>
-    </p:extLst>
-  </p:cSld>
-  <p:clrMapOvr>
-    <a:masterClrMapping/>
-  </p:clrMapOvr>
-</p:notes>
-</file>
-
-<file path=ppt/notesSlides/notesSlide6.xml><?xml version="1.0" encoding="utf-8"?>
-<p:notes xmlns:a="http://schemas.openxmlformats.org/drawingml/2006/main" xmlns:r="http://schemas.openxmlformats.org/officeDocument/2006/relationships" xmlns:p="http://schemas.openxmlformats.org/presentationml/2006/main">
-  <p:cSld>
-    <p:spTree>
-      <p:nvGrpSpPr>
-        <p:cNvPr id="1" name=""/>
-        <p:cNvGrpSpPr/>
-        <p:nvPr/>
-      </p:nvGrpSpPr>
-      <p:grpSpPr>
-        <a:xfrm>
-          <a:off x="0" y="0"/>
-          <a:ext cx="0" cy="0"/>
-          <a:chOff x="0" y="0"/>
-          <a:chExt cx="0" cy="0"/>
-        </a:xfrm>
-      </p:grpSpPr>
-      <p:sp>
-        <p:nvSpPr>
-          <p:cNvPr id="2" name="Slide Image Placeholder 1"/>
-          <p:cNvSpPr>
-            <a:spLocks noGrp="1" noRot="1" noChangeAspect="1"/>
-          </p:cNvSpPr>
-          <p:nvPr>
-            <p:ph type="sldImg"/>
-          </p:nvPr>
-        </p:nvSpPr>
-        <p:spPr/>
-      </p:sp>
-      <p:sp>
-        <p:nvSpPr>
-          <p:cNvPr id="3" name="Notes Placeholder 2"/>
-          <p:cNvSpPr>
-            <a:spLocks noGrp="1"/>
-          </p:cNvSpPr>
-          <p:nvPr>
-            <p:ph type="body" idx="1"/>
-          </p:nvPr>
-        </p:nvSpPr>
-        <p:spPr/>
-        <p:txBody>
-          <a:bodyPr/>
-          <a:lstStyle/>
-          <a:p>
-            <a:r>
-              <a:rPr lang="en-US" dirty="0"/>
-              <a:t/>
-            </a:r>
-            <a:endParaRPr lang="en-US" dirty="0"/>
-          </a:p>
-        </p:txBody>
-      </p:sp>
-      <p:sp>
-        <p:nvSpPr>
-          <p:cNvPr id="4" name="Slide Number Placeholder 3"/>
-          <p:cNvSpPr>
-            <a:spLocks noGrp="1"/>
-          </p:cNvSpPr>
-          <p:nvPr>
-            <p:ph type="sldNum" sz="quarter" idx="10"/>
-          </p:nvPr>
-        </p:nvSpPr>
-        <p:spPr/>
-        <p:txBody>
-          <a:bodyPr/>
-          <a:lstStyle/>
-          <a:p>
-            <a:fld id="{F7021451-1387-4CA6-816F-3879F97B5CBC}" type="slidenum">
-              <a:rPr lang="en-US"/>
-              <a:t>6</a:t>
             </a:fld>
             <a:endParaRPr lang="en-US"/>
           </a:p>
@@ -1653,14 +1587,17 @@
           <a:ln/>
         </p:spPr>
         <p:txBody>
-          <a:bodyPr wrap="square" lIns="0" tIns="0" rIns="0" bIns="0" rtlCol="0" anchor="ctr"/>
+          <a:bodyPr wrap="square" lIns="0" tIns="0" rIns="0" bIns="0" rtlCol="0" anchor="t"/>
           <a:lstStyle/>
           <a:p>
             <a:pPr indent="0" marL="0">
-              <a:buNone/>
-            </a:pPr>
-            <a:r>
-              <a:rPr lang="en-US" sz="1000" b="1" spc="200" kern="0" dirty="0">
+              <a:lnSpc>
+                <a:spcPts val="1280"/>
+              </a:lnSpc>
+              <a:buNone/>
+            </a:pPr>
+            <a:r>
+              <a:rPr lang="en-US" altLang="en-US" sz="1000" b="1" dirty="0">
                 <a:solidFill>
                   <a:srgbClr val="77796D"/>
                 </a:solidFill>
@@ -1677,34 +1614,6 @@
       <p:sp>
         <p:nvSpPr>
           <p:cNvPr id="6" name="Text 3"/>
-          <p:cNvSpPr/>
-          <p:nvPr/>
-        </p:nvSpPr>
-        <p:spPr>
-          <a:xfrm>
-            <a:off x="7772400" y="256032"/>
-            <a:ext cx="3803904" cy="228600"/>
-          </a:xfrm>
-          <a:prstGeom prst="rect">
-            <a:avLst/>
-          </a:prstGeom>
-          <a:noFill/>
-          <a:ln/>
-        </p:spPr>
-        <p:txBody>
-          <a:bodyPr wrap="square" lIns="0" tIns="0" rIns="0" bIns="0" rtlCol="0" anchor="ctr"/>
-          <a:lstStyle/>
-          <a:p>
-            <a:pPr algn="r" indent="0" marL="0">
-              <a:buNone/>
-            </a:pPr>
-            <a:endParaRPr lang="en-US" sz="900" dirty="0"/>
-          </a:p>
-        </p:txBody>
-      </p:sp>
-      <p:sp>
-        <p:nvSpPr>
-          <p:cNvPr id="7" name="Text 4"/>
           <p:cNvSpPr/>
           <p:nvPr/>
         </p:nvSpPr>
@@ -1720,14 +1629,17 @@
           <a:ln/>
         </p:spPr>
         <p:txBody>
-          <a:bodyPr wrap="square" lIns="0" tIns="0" rIns="0" bIns="0" rtlCol="0" anchor="ctr"/>
+          <a:bodyPr wrap="square" lIns="0" tIns="0" rIns="0" bIns="0" rtlCol="0" anchor="t"/>
           <a:lstStyle/>
           <a:p>
             <a:pPr algn="r" indent="0" marL="0">
-              <a:buNone/>
-            </a:pPr>
-            <a:r>
-              <a:rPr lang="en-US" sz="900" dirty="0">
+              <a:lnSpc>
+                <a:spcPts val="1152"/>
+              </a:lnSpc>
+              <a:buNone/>
+            </a:pPr>
+            <a:r>
+              <a:rPr lang="en-US" altLang="en-US" sz="900" dirty="0">
                 <a:solidFill>
                   <a:srgbClr val="77796D"/>
                 </a:solidFill>
@@ -1743,7 +1655,7 @@
       </p:sp>
       <p:sp>
         <p:nvSpPr>
-          <p:cNvPr id="8" name="Text 5"/>
+          <p:cNvPr id="7" name="Text 4"/>
           <p:cNvSpPr/>
           <p:nvPr/>
         </p:nvSpPr>
@@ -1759,14 +1671,17 @@
           <a:ln/>
         </p:spPr>
         <p:txBody>
-          <a:bodyPr wrap="square" lIns="0" tIns="0" rIns="0" bIns="0" rtlCol="0" anchor="ctr"/>
+          <a:bodyPr wrap="square" lIns="0" tIns="0" rIns="0" bIns="0" rtlCol="0" anchor="t"/>
           <a:lstStyle/>
           <a:p>
             <a:pPr indent="0" marL="0">
-              <a:buNone/>
-            </a:pPr>
-            <a:r>
-              <a:rPr lang="en-US" sz="900" dirty="0">
+              <a:lnSpc>
+                <a:spcPts val="1152"/>
+              </a:lnSpc>
+              <a:buNone/>
+            </a:pPr>
+            <a:r>
+              <a:rPr lang="en-US" altLang="en-US" sz="900" dirty="0">
                 <a:solidFill>
                   <a:srgbClr val="77796D"/>
                 </a:solidFill>
@@ -1782,7 +1697,7 @@
       </p:sp>
       <p:sp>
         <p:nvSpPr>
-          <p:cNvPr id="9" name="Text 6"/>
+          <p:cNvPr id="8" name="Text 5"/>
           <p:cNvSpPr/>
           <p:nvPr/>
         </p:nvSpPr>
@@ -1798,14 +1713,17 @@
           <a:ln/>
         </p:spPr>
         <p:txBody>
-          <a:bodyPr wrap="square" lIns="0" tIns="0" rIns="0" bIns="0" rtlCol="0" anchor="ctr"/>
+          <a:bodyPr wrap="square" lIns="0" tIns="0" rIns="0" bIns="0" rtlCol="0" anchor="t"/>
           <a:lstStyle/>
           <a:p>
             <a:pPr indent="0" marL="0">
-              <a:buNone/>
-            </a:pPr>
-            <a:r>
-              <a:rPr lang="en-US" sz="4000" b="1" dirty="0">
+              <a:lnSpc>
+                <a:spcPts val="4240"/>
+              </a:lnSpc>
+              <a:buNone/>
+            </a:pPr>
+            <a:r>
+              <a:rPr lang="en-US" altLang="en-US" sz="4000" b="1" dirty="0">
                 <a:solidFill>
                   <a:srgbClr val="252621"/>
                 </a:solidFill>
@@ -1813,16 +1731,19 @@
                 <a:ea typeface="Arial" pitchFamily="34" charset="-122"/>
                 <a:cs typeface="Arial" pitchFamily="34" charset="-120"/>
               </a:rPr>
-              <a:t>Spaces for</a:t>
+              <a:t>ATELIER</a:t>
             </a:r>
             <a:endParaRPr lang="en-US" sz="4000" dirty="0"/>
           </a:p>
           <a:p>
             <a:pPr indent="0" marL="0">
-              <a:buNone/>
-            </a:pPr>
-            <a:r>
-              <a:rPr lang="en-US" sz="4000" b="1" dirty="0">
+              <a:lnSpc>
+                <a:spcPts val="4240"/>
+              </a:lnSpc>
+              <a:buNone/>
+            </a:pPr>
+            <a:r>
+              <a:rPr lang="en-US" altLang="en-US" sz="4000" b="1" dirty="0">
                 <a:solidFill>
                   <a:srgbClr val="252621"/>
                 </a:solidFill>
@@ -1830,7 +1751,7 @@
                 <a:ea typeface="Arial" pitchFamily="34" charset="-122"/>
                 <a:cs typeface="Arial" pitchFamily="34" charset="-120"/>
               </a:rPr>
-              <a:t>better days.</a:t>
+              <a:t>NORTH</a:t>
             </a:r>
             <a:endParaRPr lang="en-US" sz="4000" dirty="0"/>
           </a:p>
@@ -1838,7 +1759,7 @@
       </p:sp>
       <p:sp>
         <p:nvSpPr>
-          <p:cNvPr id="10" name="Text 7"/>
+          <p:cNvPr id="9" name="Text 6"/>
           <p:cNvSpPr/>
           <p:nvPr/>
         </p:nvSpPr>
@@ -1854,14 +1775,17 @@
           <a:ln/>
         </p:spPr>
         <p:txBody>
-          <a:bodyPr wrap="square" lIns="0" tIns="0" rIns="0" bIns="0" rtlCol="0" anchor="ctr"/>
+          <a:bodyPr wrap="square" lIns="0" tIns="0" rIns="0" bIns="0" rtlCol="0" anchor="t"/>
           <a:lstStyle/>
           <a:p>
             <a:pPr indent="0" marL="0">
-              <a:buNone/>
-            </a:pPr>
-            <a:r>
-              <a:rPr lang="en-US" sz="1800" dirty="0">
+              <a:lnSpc>
+                <a:spcPts val="2304"/>
+              </a:lnSpc>
+              <a:buNone/>
+            </a:pPr>
+            <a:r>
+              <a:rPr lang="en-US" altLang="en-US" sz="1800" dirty="0">
                 <a:solidFill>
                   <a:srgbClr val="252621"/>
                 </a:solidFill>
@@ -1877,7 +1801,7 @@
       </p:sp>
       <p:sp>
         <p:nvSpPr>
-          <p:cNvPr id="11" name="Text 8"/>
+          <p:cNvPr id="10" name="Text 7"/>
           <p:cNvSpPr/>
           <p:nvPr/>
         </p:nvSpPr>
@@ -1893,14 +1817,17 @@
           <a:ln/>
         </p:spPr>
         <p:txBody>
-          <a:bodyPr wrap="square" lIns="0" tIns="0" rIns="0" bIns="0" rtlCol="0" anchor="ctr"/>
+          <a:bodyPr wrap="square" lIns="0" tIns="0" rIns="0" bIns="0" rtlCol="0" anchor="t"/>
           <a:lstStyle/>
           <a:p>
             <a:pPr indent="0" marL="0">
-              <a:buNone/>
-            </a:pPr>
-            <a:r>
-              <a:rPr lang="en-US" sz="1200" dirty="0">
+              <a:lnSpc>
+                <a:spcPts val="1536"/>
+              </a:lnSpc>
+              <a:buNone/>
+            </a:pPr>
+            <a:r>
+              <a:rPr lang="en-US" altLang="en-US" sz="1200" dirty="0">
                 <a:solidFill>
                   <a:srgbClr val="77796D"/>
                 </a:solidFill>
@@ -1928,7 +1855,7 @@
     <p:bg>
       <p:bgPr>
         <a:solidFill>
-          <a:srgbClr val="FFFFFF"/>
+          <a:srgbClr val="FAFAF7"/>
         </a:solidFill>
       </p:bgPr>
     </p:bg>
@@ -1964,14 +1891,17 @@
           <a:ln/>
         </p:spPr>
         <p:txBody>
-          <a:bodyPr wrap="square" lIns="0" tIns="0" rIns="0" bIns="0" rtlCol="0" anchor="ctr"/>
+          <a:bodyPr wrap="square" lIns="0" tIns="0" rIns="0" bIns="0" rtlCol="0" anchor="t"/>
           <a:lstStyle/>
           <a:p>
             <a:pPr indent="0" marL="0">
-              <a:buNone/>
-            </a:pPr>
-            <a:r>
-              <a:rPr lang="en-US" sz="1000" b="1" spc="200" kern="0" dirty="0">
+              <a:lnSpc>
+                <a:spcPts val="1280"/>
+              </a:lnSpc>
+              <a:buNone/>
+            </a:pPr>
+            <a:r>
+              <a:rPr lang="en-US" altLang="en-US" sz="1000" b="1" dirty="0">
                 <a:solidFill>
                   <a:srgbClr val="77796D"/>
                 </a:solidFill>
@@ -1988,34 +1918,6 @@
       <p:sp>
         <p:nvSpPr>
           <p:cNvPr id="3" name="Text 1"/>
-          <p:cNvSpPr/>
-          <p:nvPr/>
-        </p:nvSpPr>
-        <p:spPr>
-          <a:xfrm>
-            <a:off x="7772400" y="256032"/>
-            <a:ext cx="3803904" cy="228600"/>
-          </a:xfrm>
-          <a:prstGeom prst="rect">
-            <a:avLst/>
-          </a:prstGeom>
-          <a:noFill/>
-          <a:ln/>
-        </p:spPr>
-        <p:txBody>
-          <a:bodyPr wrap="square" lIns="0" tIns="0" rIns="0" bIns="0" rtlCol="0" anchor="ctr"/>
-          <a:lstStyle/>
-          <a:p>
-            <a:pPr algn="r" indent="0" marL="0">
-              <a:buNone/>
-            </a:pPr>
-            <a:endParaRPr lang="en-US" sz="900" dirty="0"/>
-          </a:p>
-        </p:txBody>
-      </p:sp>
-      <p:sp>
-        <p:nvSpPr>
-          <p:cNvPr id="4" name="Text 2"/>
           <p:cNvSpPr/>
           <p:nvPr/>
         </p:nvSpPr>
@@ -2031,14 +1933,17 @@
           <a:ln/>
         </p:spPr>
         <p:txBody>
-          <a:bodyPr wrap="square" lIns="0" tIns="0" rIns="0" bIns="0" rtlCol="0" anchor="ctr"/>
+          <a:bodyPr wrap="square" lIns="0" tIns="0" rIns="0" bIns="0" rtlCol="0" anchor="t"/>
           <a:lstStyle/>
           <a:p>
             <a:pPr algn="r" indent="0" marL="0">
-              <a:buNone/>
-            </a:pPr>
-            <a:r>
-              <a:rPr lang="en-US" sz="900" dirty="0">
+              <a:lnSpc>
+                <a:spcPts val="1152"/>
+              </a:lnSpc>
+              <a:buNone/>
+            </a:pPr>
+            <a:r>
+              <a:rPr lang="en-US" altLang="en-US" sz="900" dirty="0">
                 <a:solidFill>
                   <a:srgbClr val="77796D"/>
                 </a:solidFill>
@@ -2054,32 +1959,209 @@
       </p:sp>
       <p:sp>
         <p:nvSpPr>
+          <p:cNvPr id="4" name="Text 2"/>
+          <p:cNvSpPr/>
+          <p:nvPr/>
+        </p:nvSpPr>
+        <p:spPr>
+          <a:xfrm>
+            <a:off x="594360" y="6336792"/>
+            <a:ext cx="10149840" cy="283464"/>
+          </a:xfrm>
+          <a:prstGeom prst="rect">
+            <a:avLst/>
+          </a:prstGeom>
+          <a:noFill/>
+          <a:ln/>
+        </p:spPr>
+        <p:txBody>
+          <a:bodyPr wrap="square" lIns="0" tIns="0" rIns="0" bIns="0" rtlCol="0" anchor="t"/>
+          <a:lstStyle/>
+          <a:p>
+            <a:pPr indent="0" marL="0">
+              <a:lnSpc>
+                <a:spcPts val="1152"/>
+              </a:lnSpc>
+              <a:buNone/>
+            </a:pPr>
+            <a:r>
+              <a:rPr lang="en-US" altLang="en-US" sz="900" dirty="0">
+                <a:solidFill>
+                  <a:srgbClr val="77796D"/>
+                </a:solidFill>
+                <a:latin typeface="Arial" pitchFamily="34" charset="0"/>
+                <a:ea typeface="Arial" pitchFamily="34" charset="-122"/>
+                <a:cs typeface="Arial" pitchFamily="34" charset="-120"/>
+              </a:rPr>
+              <a:t>Fictional concept. Images express design direction, not a completed building.</a:t>
+            </a:r>
+            <a:endParaRPr lang="en-US" sz="900" dirty="0"/>
+          </a:p>
+        </p:txBody>
+      </p:sp>
+      <p:sp>
+        <p:nvSpPr>
           <p:cNvPr id="5" name="Text 3"/>
           <p:cNvSpPr/>
           <p:nvPr/>
         </p:nvSpPr>
         <p:spPr>
           <a:xfrm>
-            <a:off x="594360" y="987552"/>
-            <a:ext cx="4572000" cy="1920240"/>
-          </a:xfrm>
-          <a:prstGeom prst="rect">
-            <a:avLst/>
-          </a:prstGeom>
-          <a:noFill/>
-          <a:ln/>
-        </p:spPr>
-        <p:txBody>
-          <a:bodyPr wrap="square" lIns="0" tIns="0" rIns="0" bIns="0" rtlCol="0" anchor="ctr"/>
+            <a:off x="594360" y="1051560"/>
+            <a:ext cx="10881360" cy="594360"/>
+          </a:xfrm>
+          <a:prstGeom prst="rect">
+            <a:avLst/>
+          </a:prstGeom>
+          <a:noFill/>
+          <a:ln/>
+        </p:spPr>
+        <p:txBody>
+          <a:bodyPr wrap="square" lIns="0" tIns="0" rIns="0" bIns="0" rtlCol="0" anchor="t"/>
           <a:lstStyle/>
           <a:p>
             <a:pPr indent="0" marL="0">
-              <a:buNone/>
-            </a:pPr>
-            <a:r>
-              <a:rPr lang="en-US" sz="13000" dirty="0">
-                <a:solidFill>
-                  <a:srgbClr val="F3C400"/>
+              <a:lnSpc>
+                <a:spcPts val="3392"/>
+              </a:lnSpc>
+              <a:buNone/>
+            </a:pPr>
+            <a:r>
+              <a:rPr lang="en-US" altLang="en-US" sz="3200" dirty="0">
+                <a:solidFill>
+                  <a:srgbClr val="252621"/>
+                </a:solidFill>
+                <a:latin typeface="Arial" pitchFamily="34" charset="0"/>
+                <a:ea typeface="Arial" pitchFamily="34" charset="-122"/>
+                <a:cs typeface="Arial" pitchFamily="34" charset="-120"/>
+              </a:rPr>
+              <a:t>The pavilion concept</a:t>
+            </a:r>
+            <a:endParaRPr lang="en-US" sz="3200" dirty="0"/>
+          </a:p>
+        </p:txBody>
+      </p:sp>
+      <p:pic>
+        <p:nvPicPr>
+          <p:cNvPr id="6" name="Image 0" descr="/Users/heikikun/Documents/skills/ppt-design-polish/examples/yellow/assets/pavilion.jpg">    </p:cNvPr>
+          <p:cNvPicPr>
+            <a:picLocks noChangeAspect="1"/>
+          </p:cNvPicPr>
+          <p:nvPr/>
+        </p:nvPicPr>
+        <p:blipFill>
+          <a:blip r:embed="rId1"/>
+          <a:srcRect l="0" r="0" t="28308" b="28308"/>
+          <a:stretch/>
+        </p:blipFill>
+        <p:spPr>
+          <a:xfrm>
+            <a:off x="594360" y="2304288"/>
+            <a:ext cx="6949440" cy="3767328"/>
+          </a:xfrm>
+          <a:prstGeom prst="rect">
+            <a:avLst/>
+          </a:prstGeom>
+        </p:spPr>
+      </p:pic>
+      <p:sp>
+        <p:nvSpPr>
+          <p:cNvPr id="7" name="Shape 4"/>
+          <p:cNvSpPr/>
+          <p:nvPr/>
+        </p:nvSpPr>
+        <p:spPr>
+          <a:xfrm>
+            <a:off x="6146597" y="5058827"/>
+            <a:ext cx="292608" cy="292608"/>
+          </a:xfrm>
+          <a:prstGeom prst="ellipse">
+            <a:avLst/>
+          </a:prstGeom>
+          <a:solidFill>
+            <a:srgbClr val="C69300"/>
+          </a:solidFill>
+          <a:ln w="12700">
+            <a:solidFill>
+              <a:srgbClr val="FFFFFF"/>
+            </a:solidFill>
+            <a:prstDash val="solid"/>
+          </a:ln>
+        </p:spPr>
+      </p:sp>
+      <p:sp>
+        <p:nvSpPr>
+          <p:cNvPr id="8" name="Text 5"/>
+          <p:cNvSpPr/>
+          <p:nvPr/>
+        </p:nvSpPr>
+        <p:spPr>
+          <a:xfrm>
+            <a:off x="6146597" y="5058827"/>
+            <a:ext cx="292608" cy="292608"/>
+          </a:xfrm>
+          <a:prstGeom prst="rect">
+            <a:avLst/>
+          </a:prstGeom>
+          <a:noFill/>
+          <a:ln/>
+        </p:spPr>
+        <p:txBody>
+          <a:bodyPr wrap="square" lIns="0" tIns="0" rIns="0" bIns="0" rtlCol="0" anchor="t"/>
+          <a:lstStyle/>
+          <a:p>
+            <a:pPr algn="ctr" indent="0" marL="0">
+              <a:lnSpc>
+                <a:spcPts val="1280"/>
+              </a:lnSpc>
+              <a:buNone/>
+            </a:pPr>
+            <a:r>
+              <a:rPr lang="en-US" altLang="en-US" sz="1000" dirty="0">
+                <a:solidFill>
+                  <a:srgbClr val="FFFFFF"/>
+                </a:solidFill>
+                <a:latin typeface="Arial" pitchFamily="34" charset="0"/>
+                <a:ea typeface="Arial" pitchFamily="34" charset="-122"/>
+                <a:cs typeface="Arial" pitchFamily="34" charset="-120"/>
+              </a:rPr>
+              <a:t>1</a:t>
+            </a:r>
+            <a:endParaRPr lang="en-US" sz="1000" dirty="0"/>
+          </a:p>
+        </p:txBody>
+      </p:sp>
+      <p:sp>
+        <p:nvSpPr>
+          <p:cNvPr id="9" name="Text 6"/>
+          <p:cNvSpPr/>
+          <p:nvPr/>
+        </p:nvSpPr>
+        <p:spPr>
+          <a:xfrm>
+            <a:off x="7909560" y="2468880"/>
+            <a:ext cx="502920" cy="365760"/>
+          </a:xfrm>
+          <a:prstGeom prst="rect">
+            <a:avLst/>
+          </a:prstGeom>
+          <a:noFill/>
+          <a:ln/>
+        </p:spPr>
+        <p:txBody>
+          <a:bodyPr wrap="square" lIns="0" tIns="0" rIns="0" bIns="0" rtlCol="0" anchor="t"/>
+          <a:lstStyle/>
+          <a:p>
+            <a:pPr indent="0" marL="0">
+              <a:lnSpc>
+                <a:spcPts val="2304"/>
+              </a:lnSpc>
+              <a:buNone/>
+            </a:pPr>
+            <a:r>
+              <a:rPr lang="en-US" altLang="en-US" sz="1800" dirty="0">
+                <a:solidFill>
+                  <a:srgbClr val="C69300"/>
                 </a:solidFill>
                 <a:latin typeface="Arial" pitchFamily="34" charset="0"/>
                 <a:ea typeface="Arial" pitchFamily="34" charset="-122"/>
@@ -2087,36 +2169,39 @@
               </a:rPr>
               <a:t>01</a:t>
             </a:r>
-            <a:endParaRPr lang="en-US" sz="13000" dirty="0"/>
-          </a:p>
-        </p:txBody>
-      </p:sp>
-      <p:sp>
-        <p:nvSpPr>
-          <p:cNvPr id="6" name="Text 4"/>
-          <p:cNvSpPr/>
-          <p:nvPr/>
-        </p:nvSpPr>
-        <p:spPr>
-          <a:xfrm>
-            <a:off x="685800" y="3182112"/>
-            <a:ext cx="6492240" cy="1188720"/>
-          </a:xfrm>
-          <a:prstGeom prst="rect">
-            <a:avLst/>
-          </a:prstGeom>
-          <a:noFill/>
-          <a:ln/>
-        </p:spPr>
-        <p:txBody>
-          <a:bodyPr wrap="square" lIns="0" tIns="0" rIns="0" bIns="0" rtlCol="0" anchor="ctr"/>
+            <a:endParaRPr lang="en-US" sz="1800" dirty="0"/>
+          </a:p>
+        </p:txBody>
+      </p:sp>
+      <p:sp>
+        <p:nvSpPr>
+          <p:cNvPr id="10" name="Text 7"/>
+          <p:cNvSpPr/>
+          <p:nvPr/>
+        </p:nvSpPr>
+        <p:spPr>
+          <a:xfrm>
+            <a:off x="8522208" y="2468880"/>
+            <a:ext cx="2944368" cy="685800"/>
+          </a:xfrm>
+          <a:prstGeom prst="rect">
+            <a:avLst/>
+          </a:prstGeom>
+          <a:noFill/>
+          <a:ln/>
+        </p:spPr>
+        <p:txBody>
+          <a:bodyPr wrap="square" lIns="0" tIns="0" rIns="0" bIns="0" rtlCol="0" anchor="t"/>
           <a:lstStyle/>
           <a:p>
             <a:pPr indent="0" marL="0">
-              <a:buNone/>
-            </a:pPr>
-            <a:r>
-              <a:rPr lang="en-US" sz="4200" dirty="0">
+              <a:lnSpc>
+                <a:spcPts val="2432"/>
+              </a:lnSpc>
+              <a:buNone/>
+            </a:pPr>
+            <a:r>
+              <a:rPr lang="en-US" altLang="en-US" sz="1900" dirty="0">
                 <a:solidFill>
                   <a:srgbClr val="252621"/>
                 </a:solidFill>
@@ -2124,16 +2209,150 @@
                 <a:ea typeface="Arial" pitchFamily="34" charset="-122"/>
                 <a:cs typeface="Arial" pitchFamily="34" charset="-120"/>
               </a:rPr>
-              <a:t>Design with</a:t>
-            </a:r>
-            <a:endParaRPr lang="en-US" sz="4200" dirty="0"/>
-          </a:p>
+              <a:t>A narrow yellow entrance</a:t>
+            </a:r>
+            <a:endParaRPr lang="en-US" sz="1900" dirty="0"/>
+          </a:p>
+        </p:txBody>
+      </p:sp>
+      <p:sp>
+        <p:nvSpPr>
+          <p:cNvPr id="11" name="Shape 8"/>
+          <p:cNvSpPr/>
+          <p:nvPr/>
+        </p:nvSpPr>
+        <p:spPr>
+          <a:xfrm>
+            <a:off x="2880360" y="3966301"/>
+            <a:ext cx="292608" cy="292608"/>
+          </a:xfrm>
+          <a:prstGeom prst="ellipse">
+            <a:avLst/>
+          </a:prstGeom>
+          <a:solidFill>
+            <a:srgbClr val="C69300"/>
+          </a:solidFill>
+          <a:ln w="12700">
+            <a:solidFill>
+              <a:srgbClr val="FFFFFF"/>
+            </a:solidFill>
+            <a:prstDash val="solid"/>
+          </a:ln>
+        </p:spPr>
+      </p:sp>
+      <p:sp>
+        <p:nvSpPr>
+          <p:cNvPr id="12" name="Text 9"/>
+          <p:cNvSpPr/>
+          <p:nvPr/>
+        </p:nvSpPr>
+        <p:spPr>
+          <a:xfrm>
+            <a:off x="2880360" y="3966301"/>
+            <a:ext cx="292608" cy="292608"/>
+          </a:xfrm>
+          <a:prstGeom prst="rect">
+            <a:avLst/>
+          </a:prstGeom>
+          <a:noFill/>
+          <a:ln/>
+        </p:spPr>
+        <p:txBody>
+          <a:bodyPr wrap="square" lIns="0" tIns="0" rIns="0" bIns="0" rtlCol="0" anchor="t"/>
+          <a:lstStyle/>
+          <a:p>
+            <a:pPr algn="ctr" indent="0" marL="0">
+              <a:lnSpc>
+                <a:spcPts val="1280"/>
+              </a:lnSpc>
+              <a:buNone/>
+            </a:pPr>
+            <a:r>
+              <a:rPr lang="en-US" altLang="en-US" sz="1000" dirty="0">
+                <a:solidFill>
+                  <a:srgbClr val="FFFFFF"/>
+                </a:solidFill>
+                <a:latin typeface="Arial" pitchFamily="34" charset="0"/>
+                <a:ea typeface="Arial" pitchFamily="34" charset="-122"/>
+                <a:cs typeface="Arial" pitchFamily="34" charset="-120"/>
+              </a:rPr>
+              <a:t>2</a:t>
+            </a:r>
+            <a:endParaRPr lang="en-US" sz="1000" dirty="0"/>
+          </a:p>
+        </p:txBody>
+      </p:sp>
+      <p:sp>
+        <p:nvSpPr>
+          <p:cNvPr id="13" name="Text 10"/>
+          <p:cNvSpPr/>
+          <p:nvPr/>
+        </p:nvSpPr>
+        <p:spPr>
+          <a:xfrm>
+            <a:off x="7909560" y="3611880"/>
+            <a:ext cx="502920" cy="365760"/>
+          </a:xfrm>
+          <a:prstGeom prst="rect">
+            <a:avLst/>
+          </a:prstGeom>
+          <a:noFill/>
+          <a:ln/>
+        </p:spPr>
+        <p:txBody>
+          <a:bodyPr wrap="square" lIns="0" tIns="0" rIns="0" bIns="0" rtlCol="0" anchor="t"/>
+          <a:lstStyle/>
           <a:p>
             <a:pPr indent="0" marL="0">
-              <a:buNone/>
-            </a:pPr>
-            <a:r>
-              <a:rPr lang="en-US" sz="4200" dirty="0">
+              <a:lnSpc>
+                <a:spcPts val="2304"/>
+              </a:lnSpc>
+              <a:buNone/>
+            </a:pPr>
+            <a:r>
+              <a:rPr lang="en-US" altLang="en-US" sz="1800" dirty="0">
+                <a:solidFill>
+                  <a:srgbClr val="C69300"/>
+                </a:solidFill>
+                <a:latin typeface="Arial" pitchFamily="34" charset="0"/>
+                <a:ea typeface="Arial" pitchFamily="34" charset="-122"/>
+                <a:cs typeface="Arial" pitchFamily="34" charset="-120"/>
+              </a:rPr>
+              <a:t>02</a:t>
+            </a:r>
+            <a:endParaRPr lang="en-US" sz="1800" dirty="0"/>
+          </a:p>
+        </p:txBody>
+      </p:sp>
+      <p:sp>
+        <p:nvSpPr>
+          <p:cNvPr id="14" name="Text 11"/>
+          <p:cNvSpPr/>
+          <p:nvPr/>
+        </p:nvSpPr>
+        <p:spPr>
+          <a:xfrm>
+            <a:off x="8522208" y="3611880"/>
+            <a:ext cx="2944368" cy="685800"/>
+          </a:xfrm>
+          <a:prstGeom prst="rect">
+            <a:avLst/>
+          </a:prstGeom>
+          <a:noFill/>
+          <a:ln/>
+        </p:spPr>
+        <p:txBody>
+          <a:bodyPr wrap="square" lIns="0" tIns="0" rIns="0" bIns="0" rtlCol="0" anchor="t"/>
+          <a:lstStyle/>
+          <a:p>
+            <a:pPr indent="0" marL="0">
+              <a:lnSpc>
+                <a:spcPts val="2432"/>
+              </a:lnSpc>
+              <a:buNone/>
+            </a:pPr>
+            <a:r>
+              <a:rPr lang="en-US" altLang="en-US" sz="1900" dirty="0">
                 <a:solidFill>
                   <a:srgbClr val="252621"/>
                 </a:solidFill>
@@ -2141,48 +2360,160 @@
                 <a:ea typeface="Arial" pitchFamily="34" charset="-122"/>
                 <a:cs typeface="Arial" pitchFamily="34" charset="-120"/>
               </a:rPr>
-              <a:t>room to breathe</a:t>
-            </a:r>
-            <a:endParaRPr lang="en-US" sz="4200" dirty="0"/>
-          </a:p>
-        </p:txBody>
-      </p:sp>
-      <p:sp>
-        <p:nvSpPr>
-          <p:cNvPr id="7" name="Text 5"/>
-          <p:cNvSpPr/>
-          <p:nvPr/>
-        </p:nvSpPr>
-        <p:spPr>
-          <a:xfrm>
-            <a:off x="722376" y="4709160"/>
-            <a:ext cx="5669280" cy="548640"/>
-          </a:xfrm>
-          <a:prstGeom prst="rect">
-            <a:avLst/>
-          </a:prstGeom>
-          <a:noFill/>
-          <a:ln/>
-        </p:spPr>
-        <p:txBody>
-          <a:bodyPr wrap="square" lIns="0" tIns="0" rIns="0" bIns="0" rtlCol="0" anchor="ctr"/>
+              <a:t>Pale limestone</a:t>
+            </a:r>
+            <a:endParaRPr lang="en-US" sz="1900" dirty="0"/>
+          </a:p>
+        </p:txBody>
+      </p:sp>
+      <p:sp>
+        <p:nvSpPr>
+          <p:cNvPr id="15" name="Shape 12"/>
+          <p:cNvSpPr/>
+          <p:nvPr/>
+        </p:nvSpPr>
+        <p:spPr>
+          <a:xfrm>
+            <a:off x="1143000" y="4569074"/>
+            <a:ext cx="292608" cy="292608"/>
+          </a:xfrm>
+          <a:prstGeom prst="ellipse">
+            <a:avLst/>
+          </a:prstGeom>
+          <a:solidFill>
+            <a:srgbClr val="C69300"/>
+          </a:solidFill>
+          <a:ln w="12700">
+            <a:solidFill>
+              <a:srgbClr val="FFFFFF"/>
+            </a:solidFill>
+            <a:prstDash val="solid"/>
+          </a:ln>
+        </p:spPr>
+      </p:sp>
+      <p:sp>
+        <p:nvSpPr>
+          <p:cNvPr id="16" name="Text 13"/>
+          <p:cNvSpPr/>
+          <p:nvPr/>
+        </p:nvSpPr>
+        <p:spPr>
+          <a:xfrm>
+            <a:off x="1143000" y="4569074"/>
+            <a:ext cx="292608" cy="292608"/>
+          </a:xfrm>
+          <a:prstGeom prst="rect">
+            <a:avLst/>
+          </a:prstGeom>
+          <a:noFill/>
+          <a:ln/>
+        </p:spPr>
+        <p:txBody>
+          <a:bodyPr wrap="square" lIns="0" tIns="0" rIns="0" bIns="0" rtlCol="0" anchor="t"/>
+          <a:lstStyle/>
+          <a:p>
+            <a:pPr algn="ctr" indent="0" marL="0">
+              <a:lnSpc>
+                <a:spcPts val="1280"/>
+              </a:lnSpc>
+              <a:buNone/>
+            </a:pPr>
+            <a:r>
+              <a:rPr lang="en-US" altLang="en-US" sz="1000" dirty="0">
+                <a:solidFill>
+                  <a:srgbClr val="FFFFFF"/>
+                </a:solidFill>
+                <a:latin typeface="Arial" pitchFamily="34" charset="0"/>
+                <a:ea typeface="Arial" pitchFamily="34" charset="-122"/>
+                <a:cs typeface="Arial" pitchFamily="34" charset="-120"/>
+              </a:rPr>
+              <a:t>3</a:t>
+            </a:r>
+            <a:endParaRPr lang="en-US" sz="1000" dirty="0"/>
+          </a:p>
+        </p:txBody>
+      </p:sp>
+      <p:sp>
+        <p:nvSpPr>
+          <p:cNvPr id="17" name="Text 14"/>
+          <p:cNvSpPr/>
+          <p:nvPr/>
+        </p:nvSpPr>
+        <p:spPr>
+          <a:xfrm>
+            <a:off x="7909560" y="4754880"/>
+            <a:ext cx="502920" cy="365760"/>
+          </a:xfrm>
+          <a:prstGeom prst="rect">
+            <a:avLst/>
+          </a:prstGeom>
+          <a:noFill/>
+          <a:ln/>
+        </p:spPr>
+        <p:txBody>
+          <a:bodyPr wrap="square" lIns="0" tIns="0" rIns="0" bIns="0" rtlCol="0" anchor="t"/>
           <a:lstStyle/>
           <a:p>
             <a:pPr indent="0" marL="0">
-              <a:buNone/>
-            </a:pPr>
-            <a:r>
-              <a:rPr lang="en-US" sz="1500" dirty="0">
-                <a:solidFill>
-                  <a:srgbClr val="77796D"/>
-                </a:solidFill>
-                <a:latin typeface="Arial" pitchFamily="34" charset="0"/>
-                <a:ea typeface="Arial" pitchFamily="34" charset="-122"/>
-                <a:cs typeface="Arial" pitchFamily="34" charset="-120"/>
-              </a:rPr>
-              <a:t>A calm approach to the spaces we share.</a:t>
-            </a:r>
-            <a:endParaRPr lang="en-US" sz="1500" dirty="0"/>
+              <a:lnSpc>
+                <a:spcPts val="2304"/>
+              </a:lnSpc>
+              <a:buNone/>
+            </a:pPr>
+            <a:r>
+              <a:rPr lang="en-US" altLang="en-US" sz="1800" dirty="0">
+                <a:solidFill>
+                  <a:srgbClr val="C69300"/>
+                </a:solidFill>
+                <a:latin typeface="Arial" pitchFamily="34" charset="0"/>
+                <a:ea typeface="Arial" pitchFamily="34" charset="-122"/>
+                <a:cs typeface="Arial" pitchFamily="34" charset="-120"/>
+              </a:rPr>
+              <a:t>03</a:t>
+            </a:r>
+            <a:endParaRPr lang="en-US" sz="1800" dirty="0"/>
+          </a:p>
+        </p:txBody>
+      </p:sp>
+      <p:sp>
+        <p:nvSpPr>
+          <p:cNvPr id="18" name="Text 15"/>
+          <p:cNvSpPr/>
+          <p:nvPr/>
+        </p:nvSpPr>
+        <p:spPr>
+          <a:xfrm>
+            <a:off x="8522208" y="4754880"/>
+            <a:ext cx="2944368" cy="685800"/>
+          </a:xfrm>
+          <a:prstGeom prst="rect">
+            <a:avLst/>
+          </a:prstGeom>
+          <a:noFill/>
+          <a:ln/>
+        </p:spPr>
+        <p:txBody>
+          <a:bodyPr wrap="square" lIns="0" tIns="0" rIns="0" bIns="0" rtlCol="0" anchor="t"/>
+          <a:lstStyle/>
+          <a:p>
+            <a:pPr indent="0" marL="0">
+              <a:lnSpc>
+                <a:spcPts val="2432"/>
+              </a:lnSpc>
+              <a:buNone/>
+            </a:pPr>
+            <a:r>
+              <a:rPr lang="en-US" altLang="en-US" sz="1900" dirty="0">
+                <a:solidFill>
+                  <a:srgbClr val="252621"/>
+                </a:solidFill>
+                <a:latin typeface="Arial" pitchFamily="34" charset="0"/>
+                <a:ea typeface="Arial" pitchFamily="34" charset="-122"/>
+                <a:cs typeface="Arial" pitchFamily="34" charset="-120"/>
+              </a:rPr>
+              <a:t>Olive tree</a:t>
+            </a:r>
+            <a:endParaRPr lang="en-US" sz="1900" dirty="0"/>
           </a:p>
         </p:txBody>
       </p:sp>
@@ -2236,14 +2567,17 @@
           <a:ln/>
         </p:spPr>
         <p:txBody>
-          <a:bodyPr wrap="square" lIns="0" tIns="0" rIns="0" bIns="0" rtlCol="0" anchor="ctr"/>
+          <a:bodyPr wrap="square" lIns="0" tIns="0" rIns="0" bIns="0" rtlCol="0" anchor="t"/>
           <a:lstStyle/>
           <a:p>
             <a:pPr indent="0" marL="0">
-              <a:buNone/>
-            </a:pPr>
-            <a:r>
-              <a:rPr lang="en-US" sz="1000" b="1" spc="200" kern="0" dirty="0">
+              <a:lnSpc>
+                <a:spcPts val="1280"/>
+              </a:lnSpc>
+              <a:buNone/>
+            </a:pPr>
+            <a:r>
+              <a:rPr lang="en-US" altLang="en-US" sz="1000" b="1" dirty="0">
                 <a:solidFill>
                   <a:srgbClr val="77796D"/>
                 </a:solidFill>
@@ -2260,34 +2594,6 @@
       <p:sp>
         <p:nvSpPr>
           <p:cNvPr id="3" name="Text 1"/>
-          <p:cNvSpPr/>
-          <p:nvPr/>
-        </p:nvSpPr>
-        <p:spPr>
-          <a:xfrm>
-            <a:off x="7772400" y="256032"/>
-            <a:ext cx="3803904" cy="228600"/>
-          </a:xfrm>
-          <a:prstGeom prst="rect">
-            <a:avLst/>
-          </a:prstGeom>
-          <a:noFill/>
-          <a:ln/>
-        </p:spPr>
-        <p:txBody>
-          <a:bodyPr wrap="square" lIns="0" tIns="0" rIns="0" bIns="0" rtlCol="0" anchor="ctr"/>
-          <a:lstStyle/>
-          <a:p>
-            <a:pPr algn="r" indent="0" marL="0">
-              <a:buNone/>
-            </a:pPr>
-            <a:endParaRPr lang="en-US" sz="900" dirty="0"/>
-          </a:p>
-        </p:txBody>
-      </p:sp>
-      <p:sp>
-        <p:nvSpPr>
-          <p:cNvPr id="4" name="Text 2"/>
           <p:cNvSpPr/>
           <p:nvPr/>
         </p:nvSpPr>
@@ -2303,14 +2609,17 @@
           <a:ln/>
         </p:spPr>
         <p:txBody>
-          <a:bodyPr wrap="square" lIns="0" tIns="0" rIns="0" bIns="0" rtlCol="0" anchor="ctr"/>
+          <a:bodyPr wrap="square" lIns="0" tIns="0" rIns="0" bIns="0" rtlCol="0" anchor="t"/>
           <a:lstStyle/>
           <a:p>
             <a:pPr algn="r" indent="0" marL="0">
-              <a:buNone/>
-            </a:pPr>
-            <a:r>
-              <a:rPr lang="en-US" sz="900" dirty="0">
+              <a:lnSpc>
+                <a:spcPts val="1152"/>
+              </a:lnSpc>
+              <a:buNone/>
+            </a:pPr>
+            <a:r>
+              <a:rPr lang="en-US" altLang="en-US" sz="900" dirty="0">
                 <a:solidFill>
                   <a:srgbClr val="77796D"/>
                 </a:solidFill>
@@ -2326,7 +2635,7 @@
       </p:sp>
       <p:sp>
         <p:nvSpPr>
-          <p:cNvPr id="5" name="Text 3"/>
+          <p:cNvPr id="4" name="Text 2"/>
           <p:cNvSpPr/>
           <p:nvPr/>
         </p:nvSpPr>
@@ -2342,14 +2651,17 @@
           <a:ln/>
         </p:spPr>
         <p:txBody>
-          <a:bodyPr wrap="square" lIns="0" tIns="0" rIns="0" bIns="0" rtlCol="0" anchor="ctr"/>
+          <a:bodyPr wrap="square" lIns="0" tIns="0" rIns="0" bIns="0" rtlCol="0" anchor="t"/>
           <a:lstStyle/>
           <a:p>
             <a:pPr indent="0" marL="0">
-              <a:buNone/>
-            </a:pPr>
-            <a:r>
-              <a:rPr lang="en-US" sz="900" dirty="0">
+              <a:lnSpc>
+                <a:spcPts val="1152"/>
+              </a:lnSpc>
+              <a:buNone/>
+            </a:pPr>
+            <a:r>
+              <a:rPr lang="en-US" altLang="en-US" sz="900" dirty="0">
                 <a:solidFill>
                   <a:srgbClr val="77796D"/>
                 </a:solidFill>
@@ -2357,7 +2669,7 @@
                 <a:ea typeface="Arial" pitchFamily="34" charset="-122"/>
                 <a:cs typeface="Arial" pitchFamily="34" charset="-120"/>
               </a:rPr>
-              <a:t>Fictional concept. Images express design direction, not a completed building.</a:t>
+              <a:t>Fictional studio and illustrative data. AI-generated imagery.</a:t>
             </a:r>
             <a:endParaRPr lang="en-US" sz="900" dirty="0"/>
           </a:p>
@@ -2365,46 +2677,7 @@
       </p:sp>
       <p:sp>
         <p:nvSpPr>
-          <p:cNvPr id="6" name="Text 4"/>
-          <p:cNvSpPr/>
-          <p:nvPr/>
-        </p:nvSpPr>
-        <p:spPr>
-          <a:xfrm>
-            <a:off x="594360" y="758952"/>
-            <a:ext cx="10789920" cy="210312"/>
-          </a:xfrm>
-          <a:prstGeom prst="rect">
-            <a:avLst/>
-          </a:prstGeom>
-          <a:noFill/>
-          <a:ln/>
-        </p:spPr>
-        <p:txBody>
-          <a:bodyPr wrap="square" lIns="0" tIns="0" rIns="0" bIns="0" rtlCol="0" anchor="ctr"/>
-          <a:lstStyle/>
-          <a:p>
-            <a:pPr indent="0" marL="0">
-              <a:buNone/>
-            </a:pPr>
-            <a:r>
-              <a:rPr lang="en-US" sz="1000" spc="200" kern="0" dirty="0">
-                <a:solidFill>
-                  <a:srgbClr val="C69300"/>
-                </a:solidFill>
-                <a:latin typeface="Arial" pitchFamily="34" charset="0"/>
-                <a:ea typeface="Arial" pitchFamily="34" charset="-122"/>
-                <a:cs typeface="Arial" pitchFamily="34" charset="-120"/>
-              </a:rPr>
-              <a:t>MATERIAL AND LIGHT</a:t>
-            </a:r>
-            <a:endParaRPr lang="en-US" sz="1000" dirty="0"/>
-          </a:p>
-        </p:txBody>
-      </p:sp>
-      <p:sp>
-        <p:nvSpPr>
-          <p:cNvPr id="7" name="Text 5"/>
+          <p:cNvPr id="5" name="Text 3"/>
           <p:cNvSpPr/>
           <p:nvPr/>
         </p:nvSpPr>
@@ -2420,14 +2693,17 @@
           <a:ln/>
         </p:spPr>
         <p:txBody>
-          <a:bodyPr wrap="square" lIns="0" tIns="0" rIns="0" bIns="0" rtlCol="0" anchor="ctr"/>
+          <a:bodyPr wrap="square" lIns="0" tIns="0" rIns="0" bIns="0" rtlCol="0" anchor="t"/>
           <a:lstStyle/>
           <a:p>
             <a:pPr indent="0" marL="0">
-              <a:buNone/>
-            </a:pPr>
-            <a:r>
-              <a:rPr lang="en-US" sz="3200" dirty="0">
+              <a:lnSpc>
+                <a:spcPts val="3392"/>
+              </a:lnSpc>
+              <a:buNone/>
+            </a:pPr>
+            <a:r>
+              <a:rPr lang="en-US" altLang="en-US" sz="3200" dirty="0">
                 <a:solidFill>
                   <a:srgbClr val="252621"/>
                 </a:solidFill>
@@ -2435,164 +2711,119 @@
                 <a:ea typeface="Arial" pitchFamily="34" charset="-122"/>
                 <a:cs typeface="Arial" pitchFamily="34" charset="-120"/>
               </a:rPr>
-              <a:t>The pavilion concept</a:t>
+              <a:t>12 workplaces in a 24-project portfolio</a:t>
             </a:r>
             <a:endParaRPr lang="en-US" sz="3200" dirty="0"/>
           </a:p>
         </p:txBody>
       </p:sp>
-      <p:pic>
-        <p:nvPicPr>
-          <p:cNvPr id="8" name="Image 0" descr="/Users/heikikun/Documents/skills/ppt-design-polish/examples/yellow/assets/pavilion.jpg">    </p:cNvPr>
-          <p:cNvPicPr>
-            <a:picLocks noChangeAspect="1"/>
-          </p:cNvPicPr>
-          <p:nvPr/>
-        </p:nvPicPr>
-        <p:blipFill>
-          <a:blip r:embed="rId1"/>
-          <a:srcRect l="0" r="0" t="28308" b="28308"/>
-          <a:stretch/>
-        </p:blipFill>
-        <p:spPr>
-          <a:xfrm>
-            <a:off x="594360" y="2304288"/>
-            <a:ext cx="6949440" cy="3767328"/>
-          </a:xfrm>
-          <a:prstGeom prst="rect">
-            <a:avLst/>
-          </a:prstGeom>
-        </p:spPr>
-      </p:pic>
-      <p:sp>
-        <p:nvSpPr>
-          <p:cNvPr id="9" name="Shape 6"/>
-          <p:cNvSpPr/>
-          <p:nvPr/>
-        </p:nvSpPr>
-        <p:spPr>
-          <a:xfrm>
-            <a:off x="6146597" y="5058827"/>
-            <a:ext cx="292608" cy="292608"/>
-          </a:xfrm>
-          <a:prstGeom prst="ellipse">
-            <a:avLst/>
-          </a:prstGeom>
-          <a:solidFill>
-            <a:srgbClr val="C69300"/>
-          </a:solidFill>
-          <a:ln w="12700">
-            <a:solidFill>
-              <a:srgbClr val="FFFFFF"/>
-            </a:solidFill>
-            <a:prstDash val="solid"/>
-          </a:ln>
-        </p:spPr>
-      </p:sp>
-      <p:sp>
-        <p:nvSpPr>
-          <p:cNvPr id="10" name="Text 7"/>
-          <p:cNvSpPr/>
-          <p:nvPr/>
-        </p:nvSpPr>
-        <p:spPr>
-          <a:xfrm>
-            <a:off x="6146597" y="5058827"/>
-            <a:ext cx="292608" cy="292608"/>
-          </a:xfrm>
-          <a:prstGeom prst="rect">
-            <a:avLst/>
-          </a:prstGeom>
-          <a:noFill/>
-          <a:ln/>
-        </p:spPr>
-        <p:txBody>
-          <a:bodyPr wrap="square" lIns="0" tIns="0" rIns="0" bIns="0" rtlCol="0" anchor="ctr"/>
-          <a:lstStyle/>
-          <a:p>
-            <a:pPr algn="ctr" indent="0" marL="0">
-              <a:buNone/>
-            </a:pPr>
-            <a:r>
-              <a:rPr lang="en-US" sz="1000" dirty="0">
-                <a:solidFill>
-                  <a:srgbClr val="FFFFFF"/>
-                </a:solidFill>
-                <a:latin typeface="Arial" pitchFamily="34" charset="0"/>
-                <a:ea typeface="Arial" pitchFamily="34" charset="-122"/>
-                <a:cs typeface="Arial" pitchFamily="34" charset="-120"/>
-              </a:rPr>
-              <a:t>1</a:t>
-            </a:r>
-            <a:endParaRPr lang="en-US" sz="1000" dirty="0"/>
-          </a:p>
-        </p:txBody>
-      </p:sp>
-      <p:sp>
-        <p:nvSpPr>
-          <p:cNvPr id="11" name="Text 8"/>
-          <p:cNvSpPr/>
-          <p:nvPr/>
-        </p:nvSpPr>
-        <p:spPr>
-          <a:xfrm>
-            <a:off x="7909560" y="2468880"/>
-            <a:ext cx="502920" cy="365760"/>
-          </a:xfrm>
-          <a:prstGeom prst="rect">
-            <a:avLst/>
-          </a:prstGeom>
-          <a:noFill/>
-          <a:ln/>
-        </p:spPr>
-        <p:txBody>
-          <a:bodyPr wrap="square" lIns="0" tIns="0" rIns="0" bIns="0" rtlCol="0" anchor="ctr"/>
+      <p:graphicFrame>
+        <p:nvGraphicFramePr>
+          <p:cNvPr id="6" name="Chart 0" descr=""/>
+          <p:cNvGraphicFramePr/>
+          <p:nvPr/>
+        </p:nvGraphicFramePr>
+        <p:xfrm>
+          <a:off x="685800" y="2468880"/>
+          <a:ext cx="6949440" cy="3520440"/>
+        </p:xfrm>
+        <a:graphic xmlns:a="http://schemas.openxmlformats.org/drawingml/2006/main">
+          <a:graphicData uri="http://schemas.openxmlformats.org/drawingml/2006/chart">
+            <c:chart xmlns:c="http://schemas.openxmlformats.org/drawingml/2006/chart" r:id="rId1"/>
+          </a:graphicData>
+        </a:graphic>
+      </p:graphicFrame>
+      <p:sp>
+        <p:nvSpPr>
+          <p:cNvPr id="7" name="Text 4"/>
+          <p:cNvSpPr/>
+          <p:nvPr/>
+        </p:nvSpPr>
+        <p:spPr>
+          <a:xfrm>
+            <a:off x="8229600" y="2523744"/>
+            <a:ext cx="3246120" cy="336296"/>
+          </a:xfrm>
+          <a:prstGeom prst="rect">
+            <a:avLst/>
+          </a:prstGeom>
+          <a:noFill/>
+          <a:ln/>
+        </p:spPr>
+        <p:txBody>
+          <a:bodyPr wrap="square" lIns="0" tIns="0" rIns="0" bIns="0" rtlCol="0" anchor="t"/>
           <a:lstStyle/>
           <a:p>
             <a:pPr indent="0" marL="0">
-              <a:buNone/>
-            </a:pPr>
-            <a:r>
-              <a:rPr lang="en-US" sz="1800" dirty="0">
-                <a:solidFill>
-                  <a:srgbClr val="C69300"/>
-                </a:solidFill>
-                <a:latin typeface="Arial" pitchFamily="34" charset="0"/>
-                <a:ea typeface="Arial" pitchFamily="34" charset="-122"/>
-                <a:cs typeface="Arial" pitchFamily="34" charset="-120"/>
-              </a:rPr>
-              <a:t>01</a:t>
+              <a:lnSpc>
+                <a:spcPts val="2432"/>
+              </a:lnSpc>
+              <a:buNone/>
+            </a:pPr>
+            <a:r>
+              <a:rPr lang="en-US" altLang="en-US" sz="1900" b="1" dirty="0">
+                <a:solidFill>
+                  <a:srgbClr val="252621"/>
+                </a:solidFill>
+                <a:latin typeface="Arial" pitchFamily="34" charset="0"/>
+                <a:ea typeface="Arial" pitchFamily="34" charset="-122"/>
+                <a:cs typeface="Arial" pitchFamily="34" charset="-120"/>
+              </a:rPr>
+              <a:t>24 projects</a:t>
+            </a:r>
+            <a:endParaRPr lang="en-US" sz="1900" dirty="0"/>
+          </a:p>
+        </p:txBody>
+      </p:sp>
+      <p:sp>
+        <p:nvSpPr>
+          <p:cNvPr id="8" name="Text 5"/>
+          <p:cNvSpPr/>
+          <p:nvPr/>
+        </p:nvSpPr>
+        <p:spPr>
+          <a:xfrm>
+            <a:off x="8229600" y="2969768"/>
+            <a:ext cx="3246120" cy="905256"/>
+          </a:xfrm>
+          <a:prstGeom prst="rect">
+            <a:avLst/>
+          </a:prstGeom>
+          <a:noFill/>
+          <a:ln/>
+        </p:spPr>
+        <p:txBody>
+          <a:bodyPr wrap="square" lIns="0" tIns="0" rIns="0" bIns="0" rtlCol="0" anchor="t"/>
+          <a:lstStyle/>
+          <a:p>
+            <a:pPr indent="0" marL="0">
+              <a:lnSpc>
+                <a:spcPts val="2304"/>
+              </a:lnSpc>
+              <a:buNone/>
+            </a:pPr>
+            <a:r>
+              <a:rPr lang="en-US" altLang="en-US" sz="1800" dirty="0">
+                <a:solidFill>
+                  <a:srgbClr val="252621"/>
+                </a:solidFill>
+                <a:latin typeface="Arial" pitchFamily="34" charset="0"/>
+                <a:ea typeface="Arial" pitchFamily="34" charset="-122"/>
+                <a:cs typeface="Arial" pitchFamily="34" charset="-120"/>
+              </a:rPr>
+              <a:t>Demonstration portfolio only.</a:t>
             </a:r>
             <a:endParaRPr lang="en-US" sz="1800" dirty="0"/>
           </a:p>
-        </p:txBody>
-      </p:sp>
-      <p:sp>
-        <p:nvSpPr>
-          <p:cNvPr id="12" name="Text 9"/>
-          <p:cNvSpPr/>
-          <p:nvPr/>
-        </p:nvSpPr>
-        <p:spPr>
-          <a:xfrm>
-            <a:off x="8522208" y="2468880"/>
-            <a:ext cx="2944368" cy="685800"/>
-          </a:xfrm>
-          <a:prstGeom prst="rect">
-            <a:avLst/>
-          </a:prstGeom>
-          <a:noFill/>
-          <a:ln/>
-        </p:spPr>
-        <p:txBody>
-          <a:bodyPr wrap="square" lIns="0" tIns="0" rIns="0" bIns="0" rtlCol="0" anchor="ctr"/>
-          <a:lstStyle/>
           <a:p>
             <a:pPr indent="0" marL="0">
-              <a:buNone/>
-            </a:pPr>
-            <a:r>
-              <a:rPr lang="en-US" sz="1900" dirty="0">
+              <a:lnSpc>
+                <a:spcPts val="2304"/>
+              </a:lnSpc>
+              <a:buNone/>
+            </a:pPr>
+            <a:r>
+              <a:rPr lang="en-US" altLang="en-US" sz="1800" dirty="0">
                 <a:solidFill>
                   <a:srgbClr val="252621"/>
                 </a:solidFill>
@@ -2600,293 +2831,29 @@
                 <a:ea typeface="Arial" pitchFamily="34" charset="-122"/>
                 <a:cs typeface="Arial" pitchFamily="34" charset="-120"/>
               </a:rPr>
-              <a:t>A narrow yellow entrance</a:t>
-            </a:r>
-            <a:endParaRPr lang="en-US" sz="1900" dirty="0"/>
-          </a:p>
-        </p:txBody>
-      </p:sp>
-      <p:sp>
-        <p:nvSpPr>
-          <p:cNvPr id="13" name="Shape 10"/>
-          <p:cNvSpPr/>
-          <p:nvPr/>
-        </p:nvSpPr>
-        <p:spPr>
-          <a:xfrm>
-            <a:off x="2880360" y="3966301"/>
-            <a:ext cx="292608" cy="292608"/>
-          </a:xfrm>
-          <a:prstGeom prst="ellipse">
-            <a:avLst/>
-          </a:prstGeom>
-          <a:solidFill>
-            <a:srgbClr val="C69300"/>
-          </a:solidFill>
-          <a:ln w="12700">
-            <a:solidFill>
-              <a:srgbClr val="FFFFFF"/>
-            </a:solidFill>
-            <a:prstDash val="solid"/>
-          </a:ln>
-        </p:spPr>
-      </p:sp>
-      <p:sp>
-        <p:nvSpPr>
-          <p:cNvPr id="14" name="Text 11"/>
-          <p:cNvSpPr/>
-          <p:nvPr/>
-        </p:nvSpPr>
-        <p:spPr>
-          <a:xfrm>
-            <a:off x="2880360" y="3966301"/>
-            <a:ext cx="292608" cy="292608"/>
-          </a:xfrm>
-          <a:prstGeom prst="rect">
-            <a:avLst/>
-          </a:prstGeom>
-          <a:noFill/>
-          <a:ln/>
-        </p:spPr>
-        <p:txBody>
-          <a:bodyPr wrap="square" lIns="0" tIns="0" rIns="0" bIns="0" rtlCol="0" anchor="ctr"/>
-          <a:lstStyle/>
-          <a:p>
-            <a:pPr algn="ctr" indent="0" marL="0">
-              <a:buNone/>
-            </a:pPr>
-            <a:r>
-              <a:rPr lang="en-US" sz="1000" dirty="0">
-                <a:solidFill>
-                  <a:srgbClr val="FFFFFF"/>
-                </a:solidFill>
-                <a:latin typeface="Arial" pitchFamily="34" charset="0"/>
-                <a:ea typeface="Arial" pitchFamily="34" charset="-122"/>
-                <a:cs typeface="Arial" pitchFamily="34" charset="-120"/>
-              </a:rPr>
-              <a:t>2</a:t>
-            </a:r>
-            <a:endParaRPr lang="en-US" sz="1000" dirty="0"/>
-          </a:p>
-        </p:txBody>
-      </p:sp>
-      <p:sp>
-        <p:nvSpPr>
-          <p:cNvPr id="15" name="Text 12"/>
-          <p:cNvSpPr/>
-          <p:nvPr/>
-        </p:nvSpPr>
-        <p:spPr>
-          <a:xfrm>
-            <a:off x="7909560" y="3611880"/>
-            <a:ext cx="502920" cy="365760"/>
-          </a:xfrm>
-          <a:prstGeom prst="rect">
-            <a:avLst/>
-          </a:prstGeom>
-          <a:noFill/>
-          <a:ln/>
-        </p:spPr>
-        <p:txBody>
-          <a:bodyPr wrap="square" lIns="0" tIns="0" rIns="0" bIns="0" rtlCol="0" anchor="ctr"/>
-          <a:lstStyle/>
+              <a:t>These counts are not</a:t>
+            </a:r>
+            <a:endParaRPr lang="en-US" sz="1800" dirty="0"/>
+          </a:p>
           <a:p>
             <a:pPr indent="0" marL="0">
-              <a:buNone/>
-            </a:pPr>
-            <a:r>
-              <a:rPr lang="en-US" sz="1800" dirty="0">
-                <a:solidFill>
-                  <a:srgbClr val="C69300"/>
-                </a:solidFill>
-                <a:latin typeface="Arial" pitchFamily="34" charset="0"/>
-                <a:ea typeface="Arial" pitchFamily="34" charset="-122"/>
-                <a:cs typeface="Arial" pitchFamily="34" charset="-120"/>
-              </a:rPr>
-              <a:t>02</a:t>
+              <a:lnSpc>
+                <a:spcPts val="2304"/>
+              </a:lnSpc>
+              <a:buNone/>
+            </a:pPr>
+            <a:r>
+              <a:rPr lang="en-US" altLang="en-US" sz="1800" dirty="0">
+                <a:solidFill>
+                  <a:srgbClr val="252621"/>
+                </a:solidFill>
+                <a:latin typeface="Arial" pitchFamily="34" charset="0"/>
+                <a:ea typeface="Arial" pitchFamily="34" charset="-122"/>
+                <a:cs typeface="Arial" pitchFamily="34" charset="-120"/>
+              </a:rPr>
+              <a:t>business results.</a:t>
             </a:r>
             <a:endParaRPr lang="en-US" sz="1800" dirty="0"/>
-          </a:p>
-        </p:txBody>
-      </p:sp>
-      <p:sp>
-        <p:nvSpPr>
-          <p:cNvPr id="16" name="Text 13"/>
-          <p:cNvSpPr/>
-          <p:nvPr/>
-        </p:nvSpPr>
-        <p:spPr>
-          <a:xfrm>
-            <a:off x="8522208" y="3611880"/>
-            <a:ext cx="2944368" cy="685800"/>
-          </a:xfrm>
-          <a:prstGeom prst="rect">
-            <a:avLst/>
-          </a:prstGeom>
-          <a:noFill/>
-          <a:ln/>
-        </p:spPr>
-        <p:txBody>
-          <a:bodyPr wrap="square" lIns="0" tIns="0" rIns="0" bIns="0" rtlCol="0" anchor="ctr"/>
-          <a:lstStyle/>
-          <a:p>
-            <a:pPr indent="0" marL="0">
-              <a:buNone/>
-            </a:pPr>
-            <a:r>
-              <a:rPr lang="en-US" sz="1900" dirty="0">
-                <a:solidFill>
-                  <a:srgbClr val="252621"/>
-                </a:solidFill>
-                <a:latin typeface="Arial" pitchFamily="34" charset="0"/>
-                <a:ea typeface="Arial" pitchFamily="34" charset="-122"/>
-                <a:cs typeface="Arial" pitchFamily="34" charset="-120"/>
-              </a:rPr>
-              <a:t>Pale limestone</a:t>
-            </a:r>
-            <a:endParaRPr lang="en-US" sz="1900" dirty="0"/>
-          </a:p>
-        </p:txBody>
-      </p:sp>
-      <p:sp>
-        <p:nvSpPr>
-          <p:cNvPr id="17" name="Shape 14"/>
-          <p:cNvSpPr/>
-          <p:nvPr/>
-        </p:nvSpPr>
-        <p:spPr>
-          <a:xfrm>
-            <a:off x="1143000" y="4569074"/>
-            <a:ext cx="292608" cy="292608"/>
-          </a:xfrm>
-          <a:prstGeom prst="ellipse">
-            <a:avLst/>
-          </a:prstGeom>
-          <a:solidFill>
-            <a:srgbClr val="C69300"/>
-          </a:solidFill>
-          <a:ln w="12700">
-            <a:solidFill>
-              <a:srgbClr val="FFFFFF"/>
-            </a:solidFill>
-            <a:prstDash val="solid"/>
-          </a:ln>
-        </p:spPr>
-      </p:sp>
-      <p:sp>
-        <p:nvSpPr>
-          <p:cNvPr id="18" name="Text 15"/>
-          <p:cNvSpPr/>
-          <p:nvPr/>
-        </p:nvSpPr>
-        <p:spPr>
-          <a:xfrm>
-            <a:off x="1143000" y="4569074"/>
-            <a:ext cx="292608" cy="292608"/>
-          </a:xfrm>
-          <a:prstGeom prst="rect">
-            <a:avLst/>
-          </a:prstGeom>
-          <a:noFill/>
-          <a:ln/>
-        </p:spPr>
-        <p:txBody>
-          <a:bodyPr wrap="square" lIns="0" tIns="0" rIns="0" bIns="0" rtlCol="0" anchor="ctr"/>
-          <a:lstStyle/>
-          <a:p>
-            <a:pPr algn="ctr" indent="0" marL="0">
-              <a:buNone/>
-            </a:pPr>
-            <a:r>
-              <a:rPr lang="en-US" sz="1000" dirty="0">
-                <a:solidFill>
-                  <a:srgbClr val="FFFFFF"/>
-                </a:solidFill>
-                <a:latin typeface="Arial" pitchFamily="34" charset="0"/>
-                <a:ea typeface="Arial" pitchFamily="34" charset="-122"/>
-                <a:cs typeface="Arial" pitchFamily="34" charset="-120"/>
-              </a:rPr>
-              <a:t>3</a:t>
-            </a:r>
-            <a:endParaRPr lang="en-US" sz="1000" dirty="0"/>
-          </a:p>
-        </p:txBody>
-      </p:sp>
-      <p:sp>
-        <p:nvSpPr>
-          <p:cNvPr id="19" name="Text 16"/>
-          <p:cNvSpPr/>
-          <p:nvPr/>
-        </p:nvSpPr>
-        <p:spPr>
-          <a:xfrm>
-            <a:off x="7909560" y="4754880"/>
-            <a:ext cx="502920" cy="365760"/>
-          </a:xfrm>
-          <a:prstGeom prst="rect">
-            <a:avLst/>
-          </a:prstGeom>
-          <a:noFill/>
-          <a:ln/>
-        </p:spPr>
-        <p:txBody>
-          <a:bodyPr wrap="square" lIns="0" tIns="0" rIns="0" bIns="0" rtlCol="0" anchor="ctr"/>
-          <a:lstStyle/>
-          <a:p>
-            <a:pPr indent="0" marL="0">
-              <a:buNone/>
-            </a:pPr>
-            <a:r>
-              <a:rPr lang="en-US" sz="1800" dirty="0">
-                <a:solidFill>
-                  <a:srgbClr val="C69300"/>
-                </a:solidFill>
-                <a:latin typeface="Arial" pitchFamily="34" charset="0"/>
-                <a:ea typeface="Arial" pitchFamily="34" charset="-122"/>
-                <a:cs typeface="Arial" pitchFamily="34" charset="-120"/>
-              </a:rPr>
-              <a:t>03</a:t>
-            </a:r>
-            <a:endParaRPr lang="en-US" sz="1800" dirty="0"/>
-          </a:p>
-        </p:txBody>
-      </p:sp>
-      <p:sp>
-        <p:nvSpPr>
-          <p:cNvPr id="20" name="Text 17"/>
-          <p:cNvSpPr/>
-          <p:nvPr/>
-        </p:nvSpPr>
-        <p:spPr>
-          <a:xfrm>
-            <a:off x="8522208" y="4754880"/>
-            <a:ext cx="2944368" cy="685800"/>
-          </a:xfrm>
-          <a:prstGeom prst="rect">
-            <a:avLst/>
-          </a:prstGeom>
-          <a:noFill/>
-          <a:ln/>
-        </p:spPr>
-        <p:txBody>
-          <a:bodyPr wrap="square" lIns="0" tIns="0" rIns="0" bIns="0" rtlCol="0" anchor="ctr"/>
-          <a:lstStyle/>
-          <a:p>
-            <a:pPr indent="0" marL="0">
-              <a:buNone/>
-            </a:pPr>
-            <a:r>
-              <a:rPr lang="en-US" sz="1900" dirty="0">
-                <a:solidFill>
-                  <a:srgbClr val="252621"/>
-                </a:solidFill>
-                <a:latin typeface="Arial" pitchFamily="34" charset="0"/>
-                <a:ea typeface="Arial" pitchFamily="34" charset="-122"/>
-                <a:cs typeface="Arial" pitchFamily="34" charset="-120"/>
-              </a:rPr>
-              <a:t>Olive tree</a:t>
-            </a:r>
-            <a:endParaRPr lang="en-US" sz="1900" dirty="0"/>
           </a:p>
         </p:txBody>
       </p:sp>
@@ -2940,14 +2907,17 @@
           <a:ln/>
         </p:spPr>
         <p:txBody>
-          <a:bodyPr wrap="square" lIns="0" tIns="0" rIns="0" bIns="0" rtlCol="0" anchor="ctr"/>
+          <a:bodyPr wrap="square" lIns="0" tIns="0" rIns="0" bIns="0" rtlCol="0" anchor="t"/>
           <a:lstStyle/>
           <a:p>
             <a:pPr indent="0" marL="0">
-              <a:buNone/>
-            </a:pPr>
-            <a:r>
-              <a:rPr lang="en-US" sz="1000" b="1" spc="200" kern="0" dirty="0">
+              <a:lnSpc>
+                <a:spcPts val="1280"/>
+              </a:lnSpc>
+              <a:buNone/>
+            </a:pPr>
+            <a:r>
+              <a:rPr lang="en-US" altLang="en-US" sz="1000" b="1" dirty="0">
                 <a:solidFill>
                   <a:srgbClr val="77796D"/>
                 </a:solidFill>
@@ -2964,34 +2934,6 @@
       <p:sp>
         <p:nvSpPr>
           <p:cNvPr id="3" name="Text 1"/>
-          <p:cNvSpPr/>
-          <p:nvPr/>
-        </p:nvSpPr>
-        <p:spPr>
-          <a:xfrm>
-            <a:off x="7772400" y="256032"/>
-            <a:ext cx="3803904" cy="228600"/>
-          </a:xfrm>
-          <a:prstGeom prst="rect">
-            <a:avLst/>
-          </a:prstGeom>
-          <a:noFill/>
-          <a:ln/>
-        </p:spPr>
-        <p:txBody>
-          <a:bodyPr wrap="square" lIns="0" tIns="0" rIns="0" bIns="0" rtlCol="0" anchor="ctr"/>
-          <a:lstStyle/>
-          <a:p>
-            <a:pPr algn="r" indent="0" marL="0">
-              <a:buNone/>
-            </a:pPr>
-            <a:endParaRPr lang="en-US" sz="900" dirty="0"/>
-          </a:p>
-        </p:txBody>
-      </p:sp>
-      <p:sp>
-        <p:nvSpPr>
-          <p:cNvPr id="4" name="Text 2"/>
           <p:cNvSpPr/>
           <p:nvPr/>
         </p:nvSpPr>
@@ -3007,14 +2949,17 @@
           <a:ln/>
         </p:spPr>
         <p:txBody>
-          <a:bodyPr wrap="square" lIns="0" tIns="0" rIns="0" bIns="0" rtlCol="0" anchor="ctr"/>
+          <a:bodyPr wrap="square" lIns="0" tIns="0" rIns="0" bIns="0" rtlCol="0" anchor="t"/>
           <a:lstStyle/>
           <a:p>
             <a:pPr algn="r" indent="0" marL="0">
-              <a:buNone/>
-            </a:pPr>
-            <a:r>
-              <a:rPr lang="en-US" sz="900" dirty="0">
+              <a:lnSpc>
+                <a:spcPts val="1152"/>
+              </a:lnSpc>
+              <a:buNone/>
+            </a:pPr>
+            <a:r>
+              <a:rPr lang="en-US" altLang="en-US" sz="900" dirty="0">
                 <a:solidFill>
                   <a:srgbClr val="77796D"/>
                 </a:solidFill>
@@ -3030,7 +2975,7 @@
       </p:sp>
       <p:sp>
         <p:nvSpPr>
-          <p:cNvPr id="5" name="Text 3"/>
+          <p:cNvPr id="4" name="Text 2"/>
           <p:cNvSpPr/>
           <p:nvPr/>
         </p:nvSpPr>
@@ -3046,14 +2991,17 @@
           <a:ln/>
         </p:spPr>
         <p:txBody>
-          <a:bodyPr wrap="square" lIns="0" tIns="0" rIns="0" bIns="0" rtlCol="0" anchor="ctr"/>
+          <a:bodyPr wrap="square" lIns="0" tIns="0" rIns="0" bIns="0" rtlCol="0" anchor="t"/>
           <a:lstStyle/>
           <a:p>
             <a:pPr indent="0" marL="0">
-              <a:buNone/>
-            </a:pPr>
-            <a:r>
-              <a:rPr lang="en-US" sz="900" dirty="0">
+              <a:lnSpc>
+                <a:spcPts val="1152"/>
+              </a:lnSpc>
+              <a:buNone/>
+            </a:pPr>
+            <a:r>
+              <a:rPr lang="en-US" altLang="en-US" sz="900" dirty="0">
                 <a:solidFill>
                   <a:srgbClr val="77796D"/>
                 </a:solidFill>
@@ -3061,7 +3009,7 @@
                 <a:ea typeface="Arial" pitchFamily="34" charset="-122"/>
                 <a:cs typeface="Arial" pitchFamily="34" charset="-120"/>
               </a:rPr>
-              <a:t>Fictional studio and illustrative data. AI-generated imagery.</a:t>
+              <a:t>No project duration or fee is specified.</a:t>
             </a:r>
             <a:endParaRPr lang="en-US" sz="900" dirty="0"/>
           </a:p>
@@ -3069,46 +3017,7 @@
       </p:sp>
       <p:sp>
         <p:nvSpPr>
-          <p:cNvPr id="6" name="Text 4"/>
-          <p:cNvSpPr/>
-          <p:nvPr/>
-        </p:nvSpPr>
-        <p:spPr>
-          <a:xfrm>
-            <a:off x="594360" y="758952"/>
-            <a:ext cx="10789920" cy="210312"/>
-          </a:xfrm>
-          <a:prstGeom prst="rect">
-            <a:avLst/>
-          </a:prstGeom>
-          <a:noFill/>
-          <a:ln/>
-        </p:spPr>
-        <p:txBody>
-          <a:bodyPr wrap="square" lIns="0" tIns="0" rIns="0" bIns="0" rtlCol="0" anchor="ctr"/>
-          <a:lstStyle/>
-          <a:p>
-            <a:pPr indent="0" marL="0">
-              <a:buNone/>
-            </a:pPr>
-            <a:r>
-              <a:rPr lang="en-US" sz="1000" spc="200" kern="0" dirty="0">
-                <a:solidFill>
-                  <a:srgbClr val="C69300"/>
-                </a:solidFill>
-                <a:latin typeface="Arial" pitchFamily="34" charset="0"/>
-                <a:ea typeface="Arial" pitchFamily="34" charset="-122"/>
-                <a:cs typeface="Arial" pitchFamily="34" charset="-120"/>
-              </a:rPr>
-              <a:t>ILLUSTRATIVE PORTFOLIO</a:t>
-            </a:r>
-            <a:endParaRPr lang="en-US" sz="1000" dirty="0"/>
-          </a:p>
-        </p:txBody>
-      </p:sp>
-      <p:sp>
-        <p:nvSpPr>
-          <p:cNvPr id="7" name="Text 5"/>
+          <p:cNvPr id="5" name="Text 3"/>
           <p:cNvSpPr/>
           <p:nvPr/>
         </p:nvSpPr>
@@ -3124,14 +3033,17 @@
           <a:ln/>
         </p:spPr>
         <p:txBody>
-          <a:bodyPr wrap="square" lIns="0" tIns="0" rIns="0" bIns="0" rtlCol="0" anchor="ctr"/>
+          <a:bodyPr wrap="square" lIns="0" tIns="0" rIns="0" bIns="0" rtlCol="0" anchor="t"/>
           <a:lstStyle/>
           <a:p>
             <a:pPr indent="0" marL="0">
-              <a:buNone/>
-            </a:pPr>
-            <a:r>
-              <a:rPr lang="en-US" sz="3200" dirty="0">
+              <a:lnSpc>
+                <a:spcPts val="3392"/>
+              </a:lnSpc>
+              <a:buNone/>
+            </a:pPr>
+            <a:r>
+              <a:rPr lang="en-US" altLang="en-US" sz="3200" dirty="0">
                 <a:solidFill>
                   <a:srgbClr val="252621"/>
                 </a:solidFill>
@@ -3139,38 +3051,22 @@
                 <a:ea typeface="Arial" pitchFamily="34" charset="-122"/>
                 <a:cs typeface="Arial" pitchFamily="34" charset="-120"/>
               </a:rPr>
-              <a:t>A portfolio across three settings</a:t>
+              <a:t>Discover to deliver</a:t>
             </a:r>
             <a:endParaRPr lang="en-US" sz="3200" dirty="0"/>
           </a:p>
         </p:txBody>
       </p:sp>
-      <p:graphicFrame>
-        <p:nvGraphicFramePr>
-          <p:cNvPr id="8" name="Chart 0" descr=""/>
-          <p:cNvGraphicFramePr/>
-          <p:nvPr/>
-        </p:nvGraphicFramePr>
-        <p:xfrm>
-          <a:off x="685800" y="2468880"/>
-          <a:ext cx="6949440" cy="3520440"/>
-        </p:xfrm>
-        <a:graphic xmlns:a="http://schemas.openxmlformats.org/drawingml/2006/main">
-          <a:graphicData uri="http://schemas.openxmlformats.org/drawingml/2006/chart">
-            <c:chart xmlns:c="http://schemas.openxmlformats.org/drawingml/2006/chart" r:id="rId1"/>
-          </a:graphicData>
-        </a:graphic>
-      </p:graphicFrame>
-      <p:sp>
-        <p:nvSpPr>
-          <p:cNvPr id="9" name="Shape 6"/>
-          <p:cNvSpPr/>
-          <p:nvPr/>
-        </p:nvSpPr>
-        <p:spPr>
-          <a:xfrm>
-            <a:off x="8229600" y="2523744"/>
-            <a:ext cx="3246120" cy="0"/>
+      <p:sp>
+        <p:nvSpPr>
+          <p:cNvPr id="6" name="Shape 4"/>
+          <p:cNvSpPr/>
+          <p:nvPr/>
+        </p:nvSpPr>
+        <p:spPr>
+          <a:xfrm>
+            <a:off x="749808" y="3136392"/>
+            <a:ext cx="10607040" cy="0"/>
           </a:xfrm>
           <a:prstGeom prst="line">
             <a:avLst/>
@@ -3186,30 +3082,102 @@
       </p:sp>
       <p:sp>
         <p:nvSpPr>
-          <p:cNvPr id="10" name="Text 7"/>
-          <p:cNvSpPr/>
-          <p:nvPr/>
-        </p:nvSpPr>
-        <p:spPr>
-          <a:xfrm>
-            <a:off x="8229600" y="2670048"/>
-            <a:ext cx="3246120" cy="347472"/>
-          </a:xfrm>
-          <a:prstGeom prst="rect">
-            <a:avLst/>
-          </a:prstGeom>
-          <a:noFill/>
-          <a:ln/>
-        </p:spPr>
-        <p:txBody>
-          <a:bodyPr wrap="square" lIns="0" tIns="0" rIns="0" bIns="0" rtlCol="0" anchor="ctr"/>
+          <p:cNvPr id="7" name="Shape 5"/>
+          <p:cNvSpPr/>
+          <p:nvPr/>
+        </p:nvSpPr>
+        <p:spPr>
+          <a:xfrm>
+            <a:off x="749808" y="3063240"/>
+            <a:ext cx="146304" cy="146304"/>
+          </a:xfrm>
+          <a:prstGeom prst="rect">
+            <a:avLst/>
+          </a:prstGeom>
+          <a:solidFill>
+            <a:srgbClr val="F3C400"/>
+          </a:solidFill>
+          <a:ln w="12700">
+            <a:solidFill>
+              <a:srgbClr val="333333">
+                <a:alpha val="0"/>
+              </a:srgbClr>
+            </a:solidFill>
+            <a:prstDash val="solid"/>
+          </a:ln>
+        </p:spPr>
+      </p:sp>
+      <p:sp>
+        <p:nvSpPr>
+          <p:cNvPr id="8" name="Text 6"/>
+          <p:cNvSpPr/>
+          <p:nvPr/>
+        </p:nvSpPr>
+        <p:spPr>
+          <a:xfrm>
+            <a:off x="749808" y="2450592"/>
+            <a:ext cx="2313432" cy="502920"/>
+          </a:xfrm>
+          <a:prstGeom prst="rect">
+            <a:avLst/>
+          </a:prstGeom>
+          <a:noFill/>
+          <a:ln/>
+        </p:spPr>
+        <p:txBody>
+          <a:bodyPr wrap="square" lIns="0" tIns="0" rIns="0" bIns="0" rtlCol="0" anchor="t"/>
           <a:lstStyle/>
           <a:p>
             <a:pPr indent="0" marL="0">
-              <a:buNone/>
-            </a:pPr>
-            <a:r>
-              <a:rPr lang="en-US" sz="1900" b="1" dirty="0">
+              <a:lnSpc>
+                <a:spcPts val="3072"/>
+              </a:lnSpc>
+              <a:buNone/>
+            </a:pPr>
+            <a:r>
+              <a:rPr lang="en-US" altLang="en-US" sz="2400" dirty="0">
+                <a:solidFill>
+                  <a:srgbClr val="C69300"/>
+                </a:solidFill>
+                <a:latin typeface="Arial" pitchFamily="34" charset="0"/>
+                <a:ea typeface="Arial" pitchFamily="34" charset="-122"/>
+                <a:cs typeface="Arial" pitchFamily="34" charset="-120"/>
+              </a:rPr>
+              <a:t>01</a:t>
+            </a:r>
+            <a:endParaRPr lang="en-US" sz="2400" dirty="0"/>
+          </a:p>
+        </p:txBody>
+      </p:sp>
+      <p:sp>
+        <p:nvSpPr>
+          <p:cNvPr id="9" name="Text 7"/>
+          <p:cNvSpPr/>
+          <p:nvPr/>
+        </p:nvSpPr>
+        <p:spPr>
+          <a:xfrm>
+            <a:off x="749808" y="3511296"/>
+            <a:ext cx="2313432" cy="548640"/>
+          </a:xfrm>
+          <a:prstGeom prst="rect">
+            <a:avLst/>
+          </a:prstGeom>
+          <a:noFill/>
+          <a:ln/>
+        </p:spPr>
+        <p:txBody>
+          <a:bodyPr wrap="square" lIns="0" tIns="0" rIns="0" bIns="0" rtlCol="0" anchor="t"/>
+          <a:lstStyle/>
+          <a:p>
+            <a:pPr indent="0" marL="0">
+              <a:lnSpc>
+                <a:spcPts val="2688"/>
+              </a:lnSpc>
+              <a:buNone/>
+            </a:pPr>
+            <a:r>
+              <a:rPr lang="en-US" altLang="en-US" sz="2100" b="1" dirty="0">
                 <a:solidFill>
                   <a:srgbClr val="252621"/>
                 </a:solidFill>
@@ -3217,22 +3185,22 @@
                 <a:ea typeface="Arial" pitchFamily="34" charset="-122"/>
                 <a:cs typeface="Arial" pitchFamily="34" charset="-120"/>
               </a:rPr>
-              <a:t>24 projects</a:t>
-            </a:r>
-            <a:endParaRPr lang="en-US" sz="1900" dirty="0"/>
-          </a:p>
-        </p:txBody>
-      </p:sp>
-      <p:sp>
-        <p:nvSpPr>
-          <p:cNvPr id="11" name="Text 8"/>
-          <p:cNvSpPr/>
-          <p:nvPr/>
-        </p:nvSpPr>
-        <p:spPr>
-          <a:xfrm>
-            <a:off x="8229600" y="3127248"/>
-            <a:ext cx="3246120" cy="2697480"/>
+              <a:t>Discover</a:t>
+            </a:r>
+            <a:endParaRPr lang="en-US" sz="2100" dirty="0"/>
+          </a:p>
+        </p:txBody>
+      </p:sp>
+      <p:sp>
+        <p:nvSpPr>
+          <p:cNvPr id="10" name="Text 8"/>
+          <p:cNvSpPr/>
+          <p:nvPr/>
+        </p:nvSpPr>
+        <p:spPr>
+          <a:xfrm>
+            <a:off x="749808" y="4251960"/>
+            <a:ext cx="2313432" cy="1234440"/>
           </a:xfrm>
           <a:prstGeom prst="rect">
             <a:avLst/>
@@ -3245,10 +3213,13 @@
           <a:lstStyle/>
           <a:p>
             <a:pPr indent="0" marL="0">
-              <a:buNone/>
-            </a:pPr>
-            <a:r>
-              <a:rPr lang="en-US" sz="1500" dirty="0">
+              <a:lnSpc>
+                <a:spcPts val="2048"/>
+              </a:lnSpc>
+              <a:buNone/>
+            </a:pPr>
+            <a:r>
+              <a:rPr lang="en-US" altLang="en-US" sz="1600" dirty="0">
                 <a:solidFill>
                   <a:srgbClr val="77796D"/>
                 </a:solidFill>
@@ -3256,9 +3227,508 @@
                 <a:ea typeface="Arial" pitchFamily="34" charset="-122"/>
                 <a:cs typeface="Arial" pitchFamily="34" charset="-120"/>
               </a:rPr>
-              <a:t>Demonstration portfolio only. These counts are not business results.</a:t>
-            </a:r>
-            <a:endParaRPr lang="en-US" sz="1500" dirty="0"/>
+              <a:t>Clarify the brief.</a:t>
+            </a:r>
+            <a:endParaRPr lang="en-US" sz="1600" dirty="0"/>
+          </a:p>
+        </p:txBody>
+      </p:sp>
+      <p:sp>
+        <p:nvSpPr>
+          <p:cNvPr id="11" name="Shape 9"/>
+          <p:cNvSpPr/>
+          <p:nvPr/>
+        </p:nvSpPr>
+        <p:spPr>
+          <a:xfrm>
+            <a:off x="3447288" y="3063240"/>
+            <a:ext cx="146304" cy="146304"/>
+          </a:xfrm>
+          <a:prstGeom prst="rect">
+            <a:avLst/>
+          </a:prstGeom>
+          <a:solidFill>
+            <a:srgbClr val="F3C400"/>
+          </a:solidFill>
+          <a:ln w="12700">
+            <a:solidFill>
+              <a:srgbClr val="333333">
+                <a:alpha val="0"/>
+              </a:srgbClr>
+            </a:solidFill>
+            <a:prstDash val="solid"/>
+          </a:ln>
+        </p:spPr>
+      </p:sp>
+      <p:sp>
+        <p:nvSpPr>
+          <p:cNvPr id="12" name="Text 10"/>
+          <p:cNvSpPr/>
+          <p:nvPr/>
+        </p:nvSpPr>
+        <p:spPr>
+          <a:xfrm>
+            <a:off x="3447288" y="2450592"/>
+            <a:ext cx="2313432" cy="502920"/>
+          </a:xfrm>
+          <a:prstGeom prst="rect">
+            <a:avLst/>
+          </a:prstGeom>
+          <a:noFill/>
+          <a:ln/>
+        </p:spPr>
+        <p:txBody>
+          <a:bodyPr wrap="square" lIns="0" tIns="0" rIns="0" bIns="0" rtlCol="0" anchor="t"/>
+          <a:lstStyle/>
+          <a:p>
+            <a:pPr indent="0" marL="0">
+              <a:lnSpc>
+                <a:spcPts val="3072"/>
+              </a:lnSpc>
+              <a:buNone/>
+            </a:pPr>
+            <a:r>
+              <a:rPr lang="en-US" altLang="en-US" sz="2400" dirty="0">
+                <a:solidFill>
+                  <a:srgbClr val="C69300"/>
+                </a:solidFill>
+                <a:latin typeface="Arial" pitchFamily="34" charset="0"/>
+                <a:ea typeface="Arial" pitchFamily="34" charset="-122"/>
+                <a:cs typeface="Arial" pitchFamily="34" charset="-120"/>
+              </a:rPr>
+              <a:t>02</a:t>
+            </a:r>
+            <a:endParaRPr lang="en-US" sz="2400" dirty="0"/>
+          </a:p>
+        </p:txBody>
+      </p:sp>
+      <p:sp>
+        <p:nvSpPr>
+          <p:cNvPr id="13" name="Text 11"/>
+          <p:cNvSpPr/>
+          <p:nvPr/>
+        </p:nvSpPr>
+        <p:spPr>
+          <a:xfrm>
+            <a:off x="3447288" y="3511296"/>
+            <a:ext cx="2313432" cy="548640"/>
+          </a:xfrm>
+          <a:prstGeom prst="rect">
+            <a:avLst/>
+          </a:prstGeom>
+          <a:noFill/>
+          <a:ln/>
+        </p:spPr>
+        <p:txBody>
+          <a:bodyPr wrap="square" lIns="0" tIns="0" rIns="0" bIns="0" rtlCol="0" anchor="t"/>
+          <a:lstStyle/>
+          <a:p>
+            <a:pPr indent="0" marL="0">
+              <a:lnSpc>
+                <a:spcPts val="2688"/>
+              </a:lnSpc>
+              <a:buNone/>
+            </a:pPr>
+            <a:r>
+              <a:rPr lang="en-US" altLang="en-US" sz="2100" b="1" dirty="0">
+                <a:solidFill>
+                  <a:srgbClr val="252621"/>
+                </a:solidFill>
+                <a:latin typeface="Arial" pitchFamily="34" charset="0"/>
+                <a:ea typeface="Arial" pitchFamily="34" charset="-122"/>
+                <a:cs typeface="Arial" pitchFamily="34" charset="-120"/>
+              </a:rPr>
+              <a:t>Design</a:t>
+            </a:r>
+            <a:endParaRPr lang="en-US" sz="2100" dirty="0"/>
+          </a:p>
+        </p:txBody>
+      </p:sp>
+      <p:sp>
+        <p:nvSpPr>
+          <p:cNvPr id="14" name="Text 12"/>
+          <p:cNvSpPr/>
+          <p:nvPr/>
+        </p:nvSpPr>
+        <p:spPr>
+          <a:xfrm>
+            <a:off x="3447288" y="4251960"/>
+            <a:ext cx="2313432" cy="1234440"/>
+          </a:xfrm>
+          <a:prstGeom prst="rect">
+            <a:avLst/>
+          </a:prstGeom>
+          <a:noFill/>
+          <a:ln/>
+        </p:spPr>
+        <p:txBody>
+          <a:bodyPr wrap="square" lIns="0" tIns="0" rIns="0" bIns="0" rtlCol="0" anchor="t"/>
+          <a:lstStyle/>
+          <a:p>
+            <a:pPr indent="0" marL="0">
+              <a:lnSpc>
+                <a:spcPts val="2048"/>
+              </a:lnSpc>
+              <a:buNone/>
+            </a:pPr>
+            <a:r>
+              <a:rPr lang="en-US" altLang="en-US" sz="1600" dirty="0">
+                <a:solidFill>
+                  <a:srgbClr val="77796D"/>
+                </a:solidFill>
+                <a:latin typeface="Arial" pitchFamily="34" charset="0"/>
+                <a:ea typeface="Arial" pitchFamily="34" charset="-122"/>
+                <a:cs typeface="Arial" pitchFamily="34" charset="-120"/>
+              </a:rPr>
+              <a:t>Test spatial ideas.</a:t>
+            </a:r>
+            <a:endParaRPr lang="en-US" sz="1600" dirty="0"/>
+          </a:p>
+        </p:txBody>
+      </p:sp>
+      <p:sp>
+        <p:nvSpPr>
+          <p:cNvPr id="15" name="Shape 13"/>
+          <p:cNvSpPr/>
+          <p:nvPr/>
+        </p:nvSpPr>
+        <p:spPr>
+          <a:xfrm>
+            <a:off x="6144768" y="3063240"/>
+            <a:ext cx="146304" cy="146304"/>
+          </a:xfrm>
+          <a:prstGeom prst="rect">
+            <a:avLst/>
+          </a:prstGeom>
+          <a:solidFill>
+            <a:srgbClr val="F3C400"/>
+          </a:solidFill>
+          <a:ln w="12700">
+            <a:solidFill>
+              <a:srgbClr val="333333">
+                <a:alpha val="0"/>
+              </a:srgbClr>
+            </a:solidFill>
+            <a:prstDash val="solid"/>
+          </a:ln>
+        </p:spPr>
+      </p:sp>
+      <p:sp>
+        <p:nvSpPr>
+          <p:cNvPr id="16" name="Text 14"/>
+          <p:cNvSpPr/>
+          <p:nvPr/>
+        </p:nvSpPr>
+        <p:spPr>
+          <a:xfrm>
+            <a:off x="6144768" y="2450592"/>
+            <a:ext cx="2313432" cy="502920"/>
+          </a:xfrm>
+          <a:prstGeom prst="rect">
+            <a:avLst/>
+          </a:prstGeom>
+          <a:noFill/>
+          <a:ln/>
+        </p:spPr>
+        <p:txBody>
+          <a:bodyPr wrap="square" lIns="0" tIns="0" rIns="0" bIns="0" rtlCol="0" anchor="t"/>
+          <a:lstStyle/>
+          <a:p>
+            <a:pPr indent="0" marL="0">
+              <a:lnSpc>
+                <a:spcPts val="3072"/>
+              </a:lnSpc>
+              <a:buNone/>
+            </a:pPr>
+            <a:r>
+              <a:rPr lang="en-US" altLang="en-US" sz="2400" dirty="0">
+                <a:solidFill>
+                  <a:srgbClr val="C69300"/>
+                </a:solidFill>
+                <a:latin typeface="Arial" pitchFamily="34" charset="0"/>
+                <a:ea typeface="Arial" pitchFamily="34" charset="-122"/>
+                <a:cs typeface="Arial" pitchFamily="34" charset="-120"/>
+              </a:rPr>
+              <a:t>03</a:t>
+            </a:r>
+            <a:endParaRPr lang="en-US" sz="2400" dirty="0"/>
+          </a:p>
+        </p:txBody>
+      </p:sp>
+      <p:sp>
+        <p:nvSpPr>
+          <p:cNvPr id="17" name="Text 15"/>
+          <p:cNvSpPr/>
+          <p:nvPr/>
+        </p:nvSpPr>
+        <p:spPr>
+          <a:xfrm>
+            <a:off x="6144768" y="3511296"/>
+            <a:ext cx="2313432" cy="548640"/>
+          </a:xfrm>
+          <a:prstGeom prst="rect">
+            <a:avLst/>
+          </a:prstGeom>
+          <a:noFill/>
+          <a:ln/>
+        </p:spPr>
+        <p:txBody>
+          <a:bodyPr wrap="square" lIns="0" tIns="0" rIns="0" bIns="0" rtlCol="0" anchor="t"/>
+          <a:lstStyle/>
+          <a:p>
+            <a:pPr indent="0" marL="0">
+              <a:lnSpc>
+                <a:spcPts val="2688"/>
+              </a:lnSpc>
+              <a:buNone/>
+            </a:pPr>
+            <a:r>
+              <a:rPr lang="en-US" altLang="en-US" sz="2100" b="1" dirty="0">
+                <a:solidFill>
+                  <a:srgbClr val="252621"/>
+                </a:solidFill>
+                <a:latin typeface="Arial" pitchFamily="34" charset="0"/>
+                <a:ea typeface="Arial" pitchFamily="34" charset="-122"/>
+                <a:cs typeface="Arial" pitchFamily="34" charset="-120"/>
+              </a:rPr>
+              <a:t>Develop</a:t>
+            </a:r>
+            <a:endParaRPr lang="en-US" sz="2100" dirty="0"/>
+          </a:p>
+        </p:txBody>
+      </p:sp>
+      <p:sp>
+        <p:nvSpPr>
+          <p:cNvPr id="18" name="Text 16"/>
+          <p:cNvSpPr/>
+          <p:nvPr/>
+        </p:nvSpPr>
+        <p:spPr>
+          <a:xfrm>
+            <a:off x="6144768" y="4251960"/>
+            <a:ext cx="2313432" cy="1234440"/>
+          </a:xfrm>
+          <a:prstGeom prst="rect">
+            <a:avLst/>
+          </a:prstGeom>
+          <a:noFill/>
+          <a:ln/>
+        </p:spPr>
+        <p:txBody>
+          <a:bodyPr wrap="square" lIns="0" tIns="0" rIns="0" bIns="0" rtlCol="0" anchor="t"/>
+          <a:lstStyle/>
+          <a:p>
+            <a:pPr indent="0" marL="0">
+              <a:lnSpc>
+                <a:spcPts val="2048"/>
+              </a:lnSpc>
+              <a:buNone/>
+            </a:pPr>
+            <a:r>
+              <a:rPr lang="en-US" altLang="en-US" sz="1600" dirty="0">
+                <a:solidFill>
+                  <a:srgbClr val="77796D"/>
+                </a:solidFill>
+                <a:latin typeface="Arial" pitchFamily="34" charset="0"/>
+                <a:ea typeface="Arial" pitchFamily="34" charset="-122"/>
+                <a:cs typeface="Arial" pitchFamily="34" charset="-120"/>
+              </a:rPr>
+              <a:t>Resolve materials and</a:t>
+            </a:r>
+            <a:endParaRPr lang="en-US" sz="1600" dirty="0"/>
+          </a:p>
+          <a:p>
+            <a:pPr indent="0" marL="0">
+              <a:lnSpc>
+                <a:spcPts val="2048"/>
+              </a:lnSpc>
+              <a:buNone/>
+            </a:pPr>
+            <a:r>
+              <a:rPr lang="en-US" altLang="en-US" sz="1600" dirty="0">
+                <a:solidFill>
+                  <a:srgbClr val="77796D"/>
+                </a:solidFill>
+                <a:latin typeface="Arial" pitchFamily="34" charset="0"/>
+                <a:ea typeface="Arial" pitchFamily="34" charset="-122"/>
+                <a:cs typeface="Arial" pitchFamily="34" charset="-120"/>
+              </a:rPr>
+              <a:t>details.</a:t>
+            </a:r>
+            <a:endParaRPr lang="en-US" sz="1600" dirty="0"/>
+          </a:p>
+        </p:txBody>
+      </p:sp>
+      <p:sp>
+        <p:nvSpPr>
+          <p:cNvPr id="19" name="Shape 17"/>
+          <p:cNvSpPr/>
+          <p:nvPr/>
+        </p:nvSpPr>
+        <p:spPr>
+          <a:xfrm>
+            <a:off x="8842248" y="3063240"/>
+            <a:ext cx="146304" cy="146304"/>
+          </a:xfrm>
+          <a:prstGeom prst="rect">
+            <a:avLst/>
+          </a:prstGeom>
+          <a:solidFill>
+            <a:srgbClr val="F3C400"/>
+          </a:solidFill>
+          <a:ln w="12700">
+            <a:solidFill>
+              <a:srgbClr val="333333">
+                <a:alpha val="0"/>
+              </a:srgbClr>
+            </a:solidFill>
+            <a:prstDash val="solid"/>
+          </a:ln>
+        </p:spPr>
+      </p:sp>
+      <p:sp>
+        <p:nvSpPr>
+          <p:cNvPr id="20" name="Text 18"/>
+          <p:cNvSpPr/>
+          <p:nvPr/>
+        </p:nvSpPr>
+        <p:spPr>
+          <a:xfrm>
+            <a:off x="8842248" y="2450592"/>
+            <a:ext cx="2313432" cy="502920"/>
+          </a:xfrm>
+          <a:prstGeom prst="rect">
+            <a:avLst/>
+          </a:prstGeom>
+          <a:noFill/>
+          <a:ln/>
+        </p:spPr>
+        <p:txBody>
+          <a:bodyPr wrap="square" lIns="0" tIns="0" rIns="0" bIns="0" rtlCol="0" anchor="t"/>
+          <a:lstStyle/>
+          <a:p>
+            <a:pPr indent="0" marL="0">
+              <a:lnSpc>
+                <a:spcPts val="3072"/>
+              </a:lnSpc>
+              <a:buNone/>
+            </a:pPr>
+            <a:r>
+              <a:rPr lang="en-US" altLang="en-US" sz="2400" dirty="0">
+                <a:solidFill>
+                  <a:srgbClr val="C69300"/>
+                </a:solidFill>
+                <a:latin typeface="Arial" pitchFamily="34" charset="0"/>
+                <a:ea typeface="Arial" pitchFamily="34" charset="-122"/>
+                <a:cs typeface="Arial" pitchFamily="34" charset="-120"/>
+              </a:rPr>
+              <a:t>04</a:t>
+            </a:r>
+            <a:endParaRPr lang="en-US" sz="2400" dirty="0"/>
+          </a:p>
+        </p:txBody>
+      </p:sp>
+      <p:sp>
+        <p:nvSpPr>
+          <p:cNvPr id="21" name="Text 19"/>
+          <p:cNvSpPr/>
+          <p:nvPr/>
+        </p:nvSpPr>
+        <p:spPr>
+          <a:xfrm>
+            <a:off x="8842248" y="3511296"/>
+            <a:ext cx="2313432" cy="548640"/>
+          </a:xfrm>
+          <a:prstGeom prst="rect">
+            <a:avLst/>
+          </a:prstGeom>
+          <a:noFill/>
+          <a:ln/>
+        </p:spPr>
+        <p:txBody>
+          <a:bodyPr wrap="square" lIns="0" tIns="0" rIns="0" bIns="0" rtlCol="0" anchor="t"/>
+          <a:lstStyle/>
+          <a:p>
+            <a:pPr indent="0" marL="0">
+              <a:lnSpc>
+                <a:spcPts val="2688"/>
+              </a:lnSpc>
+              <a:buNone/>
+            </a:pPr>
+            <a:r>
+              <a:rPr lang="en-US" altLang="en-US" sz="2100" b="1" dirty="0">
+                <a:solidFill>
+                  <a:srgbClr val="252621"/>
+                </a:solidFill>
+                <a:latin typeface="Arial" pitchFamily="34" charset="0"/>
+                <a:ea typeface="Arial" pitchFamily="34" charset="-122"/>
+                <a:cs typeface="Arial" pitchFamily="34" charset="-120"/>
+              </a:rPr>
+              <a:t>Deliver</a:t>
+            </a:r>
+            <a:endParaRPr lang="en-US" sz="2100" dirty="0"/>
+          </a:p>
+        </p:txBody>
+      </p:sp>
+      <p:sp>
+        <p:nvSpPr>
+          <p:cNvPr id="22" name="Text 20"/>
+          <p:cNvSpPr/>
+          <p:nvPr/>
+        </p:nvSpPr>
+        <p:spPr>
+          <a:xfrm>
+            <a:off x="8842248" y="4251960"/>
+            <a:ext cx="2313432" cy="1234440"/>
+          </a:xfrm>
+          <a:prstGeom prst="rect">
+            <a:avLst/>
+          </a:prstGeom>
+          <a:noFill/>
+          <a:ln/>
+        </p:spPr>
+        <p:txBody>
+          <a:bodyPr wrap="square" lIns="0" tIns="0" rIns="0" bIns="0" rtlCol="0" anchor="t"/>
+          <a:lstStyle/>
+          <a:p>
+            <a:pPr indent="0" marL="0">
+              <a:lnSpc>
+                <a:spcPts val="2048"/>
+              </a:lnSpc>
+              <a:buNone/>
+            </a:pPr>
+            <a:r>
+              <a:rPr lang="en-US" altLang="en-US" sz="1600" dirty="0">
+                <a:solidFill>
+                  <a:srgbClr val="77796D"/>
+                </a:solidFill>
+                <a:latin typeface="Arial" pitchFamily="34" charset="0"/>
+                <a:ea typeface="Arial" pitchFamily="34" charset="-122"/>
+                <a:cs typeface="Arial" pitchFamily="34" charset="-120"/>
+              </a:rPr>
+              <a:t>Support the agreed</a:t>
+            </a:r>
+            <a:endParaRPr lang="en-US" sz="1600" dirty="0"/>
+          </a:p>
+          <a:p>
+            <a:pPr indent="0" marL="0">
+              <a:lnSpc>
+                <a:spcPts val="2048"/>
+              </a:lnSpc>
+              <a:buNone/>
+            </a:pPr>
+            <a:r>
+              <a:rPr lang="en-US" altLang="en-US" sz="1600" dirty="0">
+                <a:solidFill>
+                  <a:srgbClr val="77796D"/>
+                </a:solidFill>
+                <a:latin typeface="Arial" pitchFamily="34" charset="0"/>
+                <a:ea typeface="Arial" pitchFamily="34" charset="-122"/>
+                <a:cs typeface="Arial" pitchFamily="34" charset="-120"/>
+              </a:rPr>
+              <a:t>handover.</a:t>
+            </a:r>
+            <a:endParaRPr lang="en-US" sz="1600" dirty="0"/>
           </a:p>
         </p:txBody>
       </p:sp>
@@ -3312,14 +3782,17 @@
           <a:ln/>
         </p:spPr>
         <p:txBody>
-          <a:bodyPr wrap="square" lIns="0" tIns="0" rIns="0" bIns="0" rtlCol="0" anchor="ctr"/>
+          <a:bodyPr wrap="square" lIns="0" tIns="0" rIns="0" bIns="0" rtlCol="0" anchor="t"/>
           <a:lstStyle/>
           <a:p>
             <a:pPr indent="0" marL="0">
-              <a:buNone/>
-            </a:pPr>
-            <a:r>
-              <a:rPr lang="en-US" sz="1000" b="1" spc="200" kern="0" dirty="0">
+              <a:lnSpc>
+                <a:spcPts val="1280"/>
+              </a:lnSpc>
+              <a:buNone/>
+            </a:pPr>
+            <a:r>
+              <a:rPr lang="en-US" altLang="en-US" sz="1000" b="1" dirty="0">
                 <a:solidFill>
                   <a:srgbClr val="77796D"/>
                 </a:solidFill>
@@ -3336,34 +3809,6 @@
       <p:sp>
         <p:nvSpPr>
           <p:cNvPr id="3" name="Text 1"/>
-          <p:cNvSpPr/>
-          <p:nvPr/>
-        </p:nvSpPr>
-        <p:spPr>
-          <a:xfrm>
-            <a:off x="7772400" y="256032"/>
-            <a:ext cx="3803904" cy="228600"/>
-          </a:xfrm>
-          <a:prstGeom prst="rect">
-            <a:avLst/>
-          </a:prstGeom>
-          <a:noFill/>
-          <a:ln/>
-        </p:spPr>
-        <p:txBody>
-          <a:bodyPr wrap="square" lIns="0" tIns="0" rIns="0" bIns="0" rtlCol="0" anchor="ctr"/>
-          <a:lstStyle/>
-          <a:p>
-            <a:pPr algn="r" indent="0" marL="0">
-              <a:buNone/>
-            </a:pPr>
-            <a:endParaRPr lang="en-US" sz="900" dirty="0"/>
-          </a:p>
-        </p:txBody>
-      </p:sp>
-      <p:sp>
-        <p:nvSpPr>
-          <p:cNvPr id="4" name="Text 2"/>
           <p:cNvSpPr/>
           <p:nvPr/>
         </p:nvSpPr>
@@ -3379,14 +3824,17 @@
           <a:ln/>
         </p:spPr>
         <p:txBody>
-          <a:bodyPr wrap="square" lIns="0" tIns="0" rIns="0" bIns="0" rtlCol="0" anchor="ctr"/>
+          <a:bodyPr wrap="square" lIns="0" tIns="0" rIns="0" bIns="0" rtlCol="0" anchor="t"/>
           <a:lstStyle/>
           <a:p>
             <a:pPr algn="r" indent="0" marL="0">
-              <a:buNone/>
-            </a:pPr>
-            <a:r>
-              <a:rPr lang="en-US" sz="900" dirty="0">
+              <a:lnSpc>
+                <a:spcPts val="1152"/>
+              </a:lnSpc>
+              <a:buNone/>
+            </a:pPr>
+            <a:r>
+              <a:rPr lang="en-US" altLang="en-US" sz="900" dirty="0">
                 <a:solidFill>
                   <a:srgbClr val="77796D"/>
                 </a:solidFill>
@@ -3402,7 +3850,7 @@
       </p:sp>
       <p:sp>
         <p:nvSpPr>
-          <p:cNvPr id="5" name="Text 3"/>
+          <p:cNvPr id="4" name="Text 2"/>
           <p:cNvSpPr/>
           <p:nvPr/>
         </p:nvSpPr>
@@ -3418,14 +3866,17 @@
           <a:ln/>
         </p:spPr>
         <p:txBody>
-          <a:bodyPr wrap="square" lIns="0" tIns="0" rIns="0" bIns="0" rtlCol="0" anchor="ctr"/>
+          <a:bodyPr wrap="square" lIns="0" tIns="0" rIns="0" bIns="0" rtlCol="0" anchor="t"/>
           <a:lstStyle/>
           <a:p>
             <a:pPr indent="0" marL="0">
-              <a:buNone/>
-            </a:pPr>
-            <a:r>
-              <a:rPr lang="en-US" sz="900" dirty="0">
+              <a:lnSpc>
+                <a:spcPts val="1152"/>
+              </a:lnSpc>
+              <a:buNone/>
+            </a:pPr>
+            <a:r>
+              <a:rPr lang="en-US" altLang="en-US" sz="900" dirty="0">
                 <a:solidFill>
                   <a:srgbClr val="77796D"/>
                 </a:solidFill>
@@ -3433,7 +3884,7 @@
                 <a:ea typeface="Arial" pitchFamily="34" charset="-122"/>
                 <a:cs typeface="Arial" pitchFamily="34" charset="-120"/>
               </a:rPr>
-              <a:t>No project duration or fee is specified.</a:t>
+              <a:t>Fictional studio and illustrative data. AI-generated imagery.</a:t>
             </a:r>
             <a:endParaRPr lang="en-US" sz="900" dirty="0"/>
           </a:p>
@@ -3441,69 +3892,95 @@
       </p:sp>
       <p:sp>
         <p:nvSpPr>
+          <p:cNvPr id="5" name="Text 3"/>
+          <p:cNvSpPr/>
+          <p:nvPr/>
+        </p:nvSpPr>
+        <p:spPr>
+          <a:xfrm>
+            <a:off x="640080" y="1024128"/>
+            <a:ext cx="5486400" cy="1143000"/>
+          </a:xfrm>
+          <a:prstGeom prst="rect">
+            <a:avLst/>
+          </a:prstGeom>
+          <a:noFill/>
+          <a:ln/>
+        </p:spPr>
+        <p:txBody>
+          <a:bodyPr wrap="square" lIns="0" tIns="0" rIns="0" bIns="0" rtlCol="0" anchor="t"/>
+          <a:lstStyle/>
+          <a:p>
+            <a:pPr algn="l" indent="0" marL="0">
+              <a:lnSpc>
+                <a:spcPts val="3604"/>
+              </a:lnSpc>
+              <a:buNone/>
+            </a:pPr>
+            <a:r>
+              <a:rPr lang="en-US" altLang="en-US" sz="3400" b="1" dirty="0">
+                <a:solidFill>
+                  <a:srgbClr val="252621"/>
+                </a:solidFill>
+                <a:latin typeface="Arial" pitchFamily="34" charset="0"/>
+                <a:ea typeface="Arial" pitchFamily="34" charset="-122"/>
+                <a:cs typeface="Arial" pitchFamily="34" charset="-120"/>
+              </a:rPr>
+              <a:t>Daylight and material</a:t>
+            </a:r>
+            <a:endParaRPr lang="en-US" sz="3400" dirty="0"/>
+          </a:p>
+          <a:p>
+            <a:pPr algn="l" indent="0" marL="0">
+              <a:lnSpc>
+                <a:spcPts val="3604"/>
+              </a:lnSpc>
+              <a:buNone/>
+            </a:pPr>
+            <a:r>
+              <a:rPr lang="en-US" altLang="en-US" sz="3400" b="1" dirty="0">
+                <a:solidFill>
+                  <a:srgbClr val="252621"/>
+                </a:solidFill>
+                <a:latin typeface="Arial" pitchFamily="34" charset="0"/>
+                <a:ea typeface="Arial" pitchFamily="34" charset="-122"/>
+                <a:cs typeface="Arial" pitchFamily="34" charset="-120"/>
+              </a:rPr>
+              <a:t>warmth</a:t>
+            </a:r>
+            <a:endParaRPr lang="en-US" sz="3400" dirty="0"/>
+          </a:p>
+        </p:txBody>
+      </p:sp>
+      <p:sp>
+        <p:nvSpPr>
           <p:cNvPr id="6" name="Text 4"/>
           <p:cNvSpPr/>
           <p:nvPr/>
         </p:nvSpPr>
         <p:spPr>
           <a:xfrm>
-            <a:off x="594360" y="758952"/>
-            <a:ext cx="10789920" cy="210312"/>
-          </a:xfrm>
-          <a:prstGeom prst="rect">
-            <a:avLst/>
-          </a:prstGeom>
-          <a:noFill/>
-          <a:ln/>
-        </p:spPr>
-        <p:txBody>
-          <a:bodyPr wrap="square" lIns="0" tIns="0" rIns="0" bIns="0" rtlCol="0" anchor="ctr"/>
-          <a:lstStyle/>
-          <a:p>
-            <a:pPr indent="0" marL="0">
-              <a:buNone/>
-            </a:pPr>
-            <a:r>
-              <a:rPr lang="en-US" sz="1000" spc="200" kern="0" dirty="0">
-                <a:solidFill>
-                  <a:srgbClr val="C69300"/>
-                </a:solidFill>
-                <a:latin typeface="Arial" pitchFamily="34" charset="0"/>
-                <a:ea typeface="Arial" pitchFamily="34" charset="-122"/>
-                <a:cs typeface="Arial" pitchFamily="34" charset="-120"/>
-              </a:rPr>
-              <a:t>OUR PROCESS</a:t>
-            </a:r>
-            <a:endParaRPr lang="en-US" sz="1000" dirty="0"/>
-          </a:p>
-        </p:txBody>
-      </p:sp>
-      <p:sp>
-        <p:nvSpPr>
-          <p:cNvPr id="7" name="Text 5"/>
-          <p:cNvSpPr/>
-          <p:nvPr/>
-        </p:nvSpPr>
-        <p:spPr>
-          <a:xfrm>
-            <a:off x="594360" y="1051560"/>
-            <a:ext cx="10881360" cy="594360"/>
-          </a:xfrm>
-          <a:prstGeom prst="rect">
-            <a:avLst/>
-          </a:prstGeom>
-          <a:noFill/>
-          <a:ln/>
-        </p:spPr>
-        <p:txBody>
-          <a:bodyPr wrap="square" lIns="0" tIns="0" rIns="0" bIns="0" rtlCol="0" anchor="ctr"/>
-          <a:lstStyle/>
-          <a:p>
-            <a:pPr indent="0" marL="0">
-              <a:buNone/>
-            </a:pPr>
-            <a:r>
-              <a:rPr lang="en-US" sz="3200" dirty="0">
+            <a:off x="658368" y="2743200"/>
+            <a:ext cx="4663440" cy="2057400"/>
+          </a:xfrm>
+          <a:prstGeom prst="rect">
+            <a:avLst/>
+          </a:prstGeom>
+          <a:noFill/>
+          <a:ln/>
+        </p:spPr>
+        <p:txBody>
+          <a:bodyPr wrap="square" lIns="0" tIns="0" rIns="0" bIns="0" rtlCol="0" anchor="t"/>
+          <a:lstStyle/>
+          <a:p>
+            <a:pPr algn="l" indent="0" marL="0">
+              <a:lnSpc>
+                <a:spcPts val="2944"/>
+              </a:lnSpc>
+              <a:buNone/>
+            </a:pPr>
+            <a:r>
+              <a:rPr lang="en-US" altLang="en-US" sz="2300" dirty="0">
                 <a:solidFill>
                   <a:srgbClr val="252621"/>
                 </a:solidFill>
@@ -3511,127 +3988,19 @@
                 <a:ea typeface="Arial" pitchFamily="34" charset="-122"/>
                 <a:cs typeface="Arial" pitchFamily="34" charset="-120"/>
               </a:rPr>
-              <a:t>A clear process from the start</a:t>
-            </a:r>
-            <a:endParaRPr lang="en-US" sz="3200" dirty="0"/>
-          </a:p>
-        </p:txBody>
-      </p:sp>
-      <p:sp>
-        <p:nvSpPr>
-          <p:cNvPr id="8" name="Shape 6"/>
-          <p:cNvSpPr/>
-          <p:nvPr/>
-        </p:nvSpPr>
-        <p:spPr>
-          <a:xfrm>
-            <a:off x="749808" y="3136392"/>
-            <a:ext cx="10607040" cy="0"/>
-          </a:xfrm>
-          <a:prstGeom prst="line">
-            <a:avLst/>
-          </a:prstGeom>
-          <a:noFill/>
-          <a:ln w="7620">
-            <a:solidFill>
-              <a:srgbClr val="DDDFD5"/>
-            </a:solidFill>
-            <a:prstDash val="solid"/>
-          </a:ln>
-        </p:spPr>
-      </p:sp>
-      <p:sp>
-        <p:nvSpPr>
-          <p:cNvPr id="9" name="Shape 7"/>
-          <p:cNvSpPr/>
-          <p:nvPr/>
-        </p:nvSpPr>
-        <p:spPr>
-          <a:xfrm>
-            <a:off x="749808" y="3063240"/>
-            <a:ext cx="146304" cy="146304"/>
-          </a:xfrm>
-          <a:prstGeom prst="rect">
-            <a:avLst/>
-          </a:prstGeom>
-          <a:solidFill>
-            <a:srgbClr val="F3C400"/>
-          </a:solidFill>
-          <a:ln w="12700">
-            <a:solidFill>
-              <a:srgbClr val="333333">
-                <a:alpha val="0"/>
-              </a:srgbClr>
-            </a:solidFill>
-            <a:prstDash val="solid"/>
-          </a:ln>
-        </p:spPr>
-      </p:sp>
-      <p:sp>
-        <p:nvSpPr>
-          <p:cNvPr id="10" name="Text 8"/>
-          <p:cNvSpPr/>
-          <p:nvPr/>
-        </p:nvSpPr>
-        <p:spPr>
-          <a:xfrm>
-            <a:off x="749808" y="2450592"/>
-            <a:ext cx="2313432" cy="502920"/>
-          </a:xfrm>
-          <a:prstGeom prst="rect">
-            <a:avLst/>
-          </a:prstGeom>
-          <a:noFill/>
-          <a:ln/>
-        </p:spPr>
-        <p:txBody>
-          <a:bodyPr wrap="square" lIns="0" tIns="0" rIns="0" bIns="0" rtlCol="0" anchor="ctr"/>
-          <a:lstStyle/>
-          <a:p>
-            <a:pPr indent="0" marL="0">
-              <a:buNone/>
-            </a:pPr>
-            <a:r>
-              <a:rPr lang="en-US" sz="2400" dirty="0">
-                <a:solidFill>
-                  <a:srgbClr val="C69300"/>
-                </a:solidFill>
-                <a:latin typeface="Arial" pitchFamily="34" charset="0"/>
-                <a:ea typeface="Arial" pitchFamily="34" charset="-122"/>
-                <a:cs typeface="Arial" pitchFamily="34" charset="-120"/>
-              </a:rPr>
-              <a:t>01</a:t>
-            </a:r>
-            <a:endParaRPr lang="en-US" sz="2400" dirty="0"/>
-          </a:p>
-        </p:txBody>
-      </p:sp>
-      <p:sp>
-        <p:nvSpPr>
-          <p:cNvPr id="11" name="Text 9"/>
-          <p:cNvSpPr/>
-          <p:nvPr/>
-        </p:nvSpPr>
-        <p:spPr>
-          <a:xfrm>
-            <a:off x="749808" y="3511296"/>
-            <a:ext cx="2313432" cy="548640"/>
-          </a:xfrm>
-          <a:prstGeom prst="rect">
-            <a:avLst/>
-          </a:prstGeom>
-          <a:noFill/>
-          <a:ln/>
-        </p:spPr>
-        <p:txBody>
-          <a:bodyPr wrap="square" lIns="0" tIns="0" rIns="0" bIns="0" rtlCol="0" anchor="ctr"/>
-          <a:lstStyle/>
-          <a:p>
-            <a:pPr indent="0" marL="0">
-              <a:buNone/>
-            </a:pPr>
-            <a:r>
-              <a:rPr lang="en-US" sz="2100" b="1" dirty="0">
+              <a:t>We design calm workspaces and</a:t>
+            </a:r>
+            <a:endParaRPr lang="en-US" sz="2300" dirty="0"/>
+          </a:p>
+          <a:p>
+            <a:pPr algn="l" indent="0" marL="0">
+              <a:lnSpc>
+                <a:spcPts val="2944"/>
+              </a:lnSpc>
+              <a:buNone/>
+            </a:pPr>
+            <a:r>
+              <a:rPr lang="en-US" altLang="en-US" sz="2300" dirty="0">
                 <a:solidFill>
                   <a:srgbClr val="252621"/>
                 </a:solidFill>
@@ -3639,143 +4008,19 @@
                 <a:ea typeface="Arial" pitchFamily="34" charset="-122"/>
                 <a:cs typeface="Arial" pitchFamily="34" charset="-120"/>
               </a:rPr>
-              <a:t>Discover</a:t>
-            </a:r>
-            <a:endParaRPr lang="en-US" sz="2100" dirty="0"/>
-          </a:p>
-        </p:txBody>
-      </p:sp>
-      <p:sp>
-        <p:nvSpPr>
-          <p:cNvPr id="12" name="Text 10"/>
-          <p:cNvSpPr/>
-          <p:nvPr/>
-        </p:nvSpPr>
-        <p:spPr>
-          <a:xfrm>
-            <a:off x="749808" y="4251960"/>
-            <a:ext cx="2313432" cy="1234440"/>
-          </a:xfrm>
-          <a:prstGeom prst="rect">
-            <a:avLst/>
-          </a:prstGeom>
-          <a:noFill/>
-          <a:ln/>
-        </p:spPr>
-        <p:txBody>
-          <a:bodyPr wrap="square" lIns="0" tIns="0" rIns="0" bIns="0" rtlCol="0" anchor="t"/>
-          <a:lstStyle/>
-          <a:p>
-            <a:pPr indent="0" marL="0">
-              <a:buNone/>
-            </a:pPr>
-            <a:r>
-              <a:rPr lang="en-US" sz="1600" dirty="0">
-                <a:solidFill>
-                  <a:srgbClr val="77796D"/>
-                </a:solidFill>
-                <a:latin typeface="Arial" pitchFamily="34" charset="0"/>
-                <a:ea typeface="Arial" pitchFamily="34" charset="-122"/>
-                <a:cs typeface="Arial" pitchFamily="34" charset="-120"/>
-              </a:rPr>
-              <a:t>Clarify the brief.</a:t>
-            </a:r>
-            <a:endParaRPr lang="en-US" sz="1600" dirty="0"/>
-          </a:p>
-        </p:txBody>
-      </p:sp>
-      <p:sp>
-        <p:nvSpPr>
-          <p:cNvPr id="13" name="Shape 11"/>
-          <p:cNvSpPr/>
-          <p:nvPr/>
-        </p:nvSpPr>
-        <p:spPr>
-          <a:xfrm>
-            <a:off x="3447288" y="3063240"/>
-            <a:ext cx="146304" cy="146304"/>
-          </a:xfrm>
-          <a:prstGeom prst="rect">
-            <a:avLst/>
-          </a:prstGeom>
-          <a:solidFill>
-            <a:srgbClr val="F3C400"/>
-          </a:solidFill>
-          <a:ln w="12700">
-            <a:solidFill>
-              <a:srgbClr val="333333">
-                <a:alpha val="0"/>
-              </a:srgbClr>
-            </a:solidFill>
-            <a:prstDash val="solid"/>
-          </a:ln>
-        </p:spPr>
-      </p:sp>
-      <p:sp>
-        <p:nvSpPr>
-          <p:cNvPr id="14" name="Text 12"/>
-          <p:cNvSpPr/>
-          <p:nvPr/>
-        </p:nvSpPr>
-        <p:spPr>
-          <a:xfrm>
-            <a:off x="3447288" y="2450592"/>
-            <a:ext cx="2313432" cy="502920"/>
-          </a:xfrm>
-          <a:prstGeom prst="rect">
-            <a:avLst/>
-          </a:prstGeom>
-          <a:noFill/>
-          <a:ln/>
-        </p:spPr>
-        <p:txBody>
-          <a:bodyPr wrap="square" lIns="0" tIns="0" rIns="0" bIns="0" rtlCol="0" anchor="ctr"/>
-          <a:lstStyle/>
-          <a:p>
-            <a:pPr indent="0" marL="0">
-              <a:buNone/>
-            </a:pPr>
-            <a:r>
-              <a:rPr lang="en-US" sz="2400" dirty="0">
-                <a:solidFill>
-                  <a:srgbClr val="C69300"/>
-                </a:solidFill>
-                <a:latin typeface="Arial" pitchFamily="34" charset="0"/>
-                <a:ea typeface="Arial" pitchFamily="34" charset="-122"/>
-                <a:cs typeface="Arial" pitchFamily="34" charset="-120"/>
-              </a:rPr>
-              <a:t>02</a:t>
-            </a:r>
-            <a:endParaRPr lang="en-US" sz="2400" dirty="0"/>
-          </a:p>
-        </p:txBody>
-      </p:sp>
-      <p:sp>
-        <p:nvSpPr>
-          <p:cNvPr id="15" name="Text 13"/>
-          <p:cNvSpPr/>
-          <p:nvPr/>
-        </p:nvSpPr>
-        <p:spPr>
-          <a:xfrm>
-            <a:off x="3447288" y="3511296"/>
-            <a:ext cx="2313432" cy="548640"/>
-          </a:xfrm>
-          <a:prstGeom prst="rect">
-            <a:avLst/>
-          </a:prstGeom>
-          <a:noFill/>
-          <a:ln/>
-        </p:spPr>
-        <p:txBody>
-          <a:bodyPr wrap="square" lIns="0" tIns="0" rIns="0" bIns="0" rtlCol="0" anchor="ctr"/>
-          <a:lstStyle/>
-          <a:p>
-            <a:pPr indent="0" marL="0">
-              <a:buNone/>
-            </a:pPr>
-            <a:r>
-              <a:rPr lang="en-US" sz="2100" b="1" dirty="0">
+              <a:t>small cultural buildings through</a:t>
+            </a:r>
+            <a:endParaRPr lang="en-US" sz="2300" dirty="0"/>
+          </a:p>
+          <a:p>
+            <a:pPr algn="l" indent="0" marL="0">
+              <a:lnSpc>
+                <a:spcPts val="2944"/>
+              </a:lnSpc>
+              <a:buNone/>
+            </a:pPr>
+            <a:r>
+              <a:rPr lang="en-US" altLang="en-US" sz="2300" dirty="0">
                 <a:solidFill>
                   <a:srgbClr val="252621"/>
                 </a:solidFill>
@@ -3783,143 +4028,19 @@
                 <a:ea typeface="Arial" pitchFamily="34" charset="-122"/>
                 <a:cs typeface="Arial" pitchFamily="34" charset="-120"/>
               </a:rPr>
-              <a:t>Design</a:t>
-            </a:r>
-            <a:endParaRPr lang="en-US" sz="2100" dirty="0"/>
-          </a:p>
-        </p:txBody>
-      </p:sp>
-      <p:sp>
-        <p:nvSpPr>
-          <p:cNvPr id="16" name="Text 14"/>
-          <p:cNvSpPr/>
-          <p:nvPr/>
-        </p:nvSpPr>
-        <p:spPr>
-          <a:xfrm>
-            <a:off x="3447288" y="4251960"/>
-            <a:ext cx="2313432" cy="1234440"/>
-          </a:xfrm>
-          <a:prstGeom prst="rect">
-            <a:avLst/>
-          </a:prstGeom>
-          <a:noFill/>
-          <a:ln/>
-        </p:spPr>
-        <p:txBody>
-          <a:bodyPr wrap="square" lIns="0" tIns="0" rIns="0" bIns="0" rtlCol="0" anchor="t"/>
-          <a:lstStyle/>
-          <a:p>
-            <a:pPr indent="0" marL="0">
-              <a:buNone/>
-            </a:pPr>
-            <a:r>
-              <a:rPr lang="en-US" sz="1600" dirty="0">
-                <a:solidFill>
-                  <a:srgbClr val="77796D"/>
-                </a:solidFill>
-                <a:latin typeface="Arial" pitchFamily="34" charset="0"/>
-                <a:ea typeface="Arial" pitchFamily="34" charset="-122"/>
-                <a:cs typeface="Arial" pitchFamily="34" charset="-120"/>
-              </a:rPr>
-              <a:t>Test spatial ideas.</a:t>
-            </a:r>
-            <a:endParaRPr lang="en-US" sz="1600" dirty="0"/>
-          </a:p>
-        </p:txBody>
-      </p:sp>
-      <p:sp>
-        <p:nvSpPr>
-          <p:cNvPr id="17" name="Shape 15"/>
-          <p:cNvSpPr/>
-          <p:nvPr/>
-        </p:nvSpPr>
-        <p:spPr>
-          <a:xfrm>
-            <a:off x="6144768" y="3063240"/>
-            <a:ext cx="146304" cy="146304"/>
-          </a:xfrm>
-          <a:prstGeom prst="rect">
-            <a:avLst/>
-          </a:prstGeom>
-          <a:solidFill>
-            <a:srgbClr val="F3C400"/>
-          </a:solidFill>
-          <a:ln w="12700">
-            <a:solidFill>
-              <a:srgbClr val="333333">
-                <a:alpha val="0"/>
-              </a:srgbClr>
-            </a:solidFill>
-            <a:prstDash val="solid"/>
-          </a:ln>
-        </p:spPr>
-      </p:sp>
-      <p:sp>
-        <p:nvSpPr>
-          <p:cNvPr id="18" name="Text 16"/>
-          <p:cNvSpPr/>
-          <p:nvPr/>
-        </p:nvSpPr>
-        <p:spPr>
-          <a:xfrm>
-            <a:off x="6144768" y="2450592"/>
-            <a:ext cx="2313432" cy="502920"/>
-          </a:xfrm>
-          <a:prstGeom prst="rect">
-            <a:avLst/>
-          </a:prstGeom>
-          <a:noFill/>
-          <a:ln/>
-        </p:spPr>
-        <p:txBody>
-          <a:bodyPr wrap="square" lIns="0" tIns="0" rIns="0" bIns="0" rtlCol="0" anchor="ctr"/>
-          <a:lstStyle/>
-          <a:p>
-            <a:pPr indent="0" marL="0">
-              <a:buNone/>
-            </a:pPr>
-            <a:r>
-              <a:rPr lang="en-US" sz="2400" dirty="0">
-                <a:solidFill>
-                  <a:srgbClr val="C69300"/>
-                </a:solidFill>
-                <a:latin typeface="Arial" pitchFamily="34" charset="0"/>
-                <a:ea typeface="Arial" pitchFamily="34" charset="-122"/>
-                <a:cs typeface="Arial" pitchFamily="34" charset="-120"/>
-              </a:rPr>
-              <a:t>03</a:t>
-            </a:r>
-            <a:endParaRPr lang="en-US" sz="2400" dirty="0"/>
-          </a:p>
-        </p:txBody>
-      </p:sp>
-      <p:sp>
-        <p:nvSpPr>
-          <p:cNvPr id="19" name="Text 17"/>
-          <p:cNvSpPr/>
-          <p:nvPr/>
-        </p:nvSpPr>
-        <p:spPr>
-          <a:xfrm>
-            <a:off x="6144768" y="3511296"/>
-            <a:ext cx="2313432" cy="548640"/>
-          </a:xfrm>
-          <a:prstGeom prst="rect">
-            <a:avLst/>
-          </a:prstGeom>
-          <a:noFill/>
-          <a:ln/>
-        </p:spPr>
-        <p:txBody>
-          <a:bodyPr wrap="square" lIns="0" tIns="0" rIns="0" bIns="0" rtlCol="0" anchor="ctr"/>
-          <a:lstStyle/>
-          <a:p>
-            <a:pPr indent="0" marL="0">
-              <a:buNone/>
-            </a:pPr>
-            <a:r>
-              <a:rPr lang="en-US" sz="2100" b="1" dirty="0">
+              <a:t>careful use of daylight, tactile</a:t>
+            </a:r>
+            <a:endParaRPr lang="en-US" sz="2300" dirty="0"/>
+          </a:p>
+          <a:p>
+            <a:pPr algn="l" indent="0" marL="0">
+              <a:lnSpc>
+                <a:spcPts val="2944"/>
+              </a:lnSpc>
+              <a:buNone/>
+            </a:pPr>
+            <a:r>
+              <a:rPr lang="en-US" altLang="en-US" sz="2300" dirty="0">
                 <a:solidFill>
                   <a:srgbClr val="252621"/>
                 </a:solidFill>
@@ -3927,753 +4048,35 @@
                 <a:ea typeface="Arial" pitchFamily="34" charset="-122"/>
                 <a:cs typeface="Arial" pitchFamily="34" charset="-120"/>
               </a:rPr>
-              <a:t>Develop</a:t>
-            </a:r>
-            <a:endParaRPr lang="en-US" sz="2100" dirty="0"/>
-          </a:p>
-        </p:txBody>
-      </p:sp>
-      <p:sp>
-        <p:nvSpPr>
-          <p:cNvPr id="20" name="Text 18"/>
-          <p:cNvSpPr/>
-          <p:nvPr/>
-        </p:nvSpPr>
-        <p:spPr>
-          <a:xfrm>
-            <a:off x="6144768" y="4251960"/>
-            <a:ext cx="2313432" cy="1234440"/>
-          </a:xfrm>
-          <a:prstGeom prst="rect">
-            <a:avLst/>
-          </a:prstGeom>
-          <a:noFill/>
-          <a:ln/>
-        </p:spPr>
-        <p:txBody>
-          <a:bodyPr wrap="square" lIns="0" tIns="0" rIns="0" bIns="0" rtlCol="0" anchor="t"/>
-          <a:lstStyle/>
-          <a:p>
-            <a:pPr indent="0" marL="0">
-              <a:buNone/>
-            </a:pPr>
-            <a:r>
-              <a:rPr lang="en-US" sz="1600" dirty="0">
-                <a:solidFill>
-                  <a:srgbClr val="77796D"/>
-                </a:solidFill>
-                <a:latin typeface="Arial" pitchFamily="34" charset="0"/>
-                <a:ea typeface="Arial" pitchFamily="34" charset="-122"/>
-                <a:cs typeface="Arial" pitchFamily="34" charset="-120"/>
-              </a:rPr>
-              <a:t>Resolve materials and details.</a:t>
-            </a:r>
-            <a:endParaRPr lang="en-US" sz="1600" dirty="0"/>
-          </a:p>
-        </p:txBody>
-      </p:sp>
-      <p:sp>
-        <p:nvSpPr>
-          <p:cNvPr id="21" name="Shape 19"/>
-          <p:cNvSpPr/>
-          <p:nvPr/>
-        </p:nvSpPr>
-        <p:spPr>
-          <a:xfrm>
-            <a:off x="8842248" y="3063240"/>
-            <a:ext cx="146304" cy="146304"/>
-          </a:xfrm>
-          <a:prstGeom prst="rect">
-            <a:avLst/>
-          </a:prstGeom>
-          <a:solidFill>
-            <a:srgbClr val="F3C400"/>
-          </a:solidFill>
-          <a:ln w="12700">
-            <a:solidFill>
-              <a:srgbClr val="333333">
-                <a:alpha val="0"/>
-              </a:srgbClr>
-            </a:solidFill>
-            <a:prstDash val="solid"/>
-          </a:ln>
-        </p:spPr>
-      </p:sp>
-      <p:sp>
-        <p:nvSpPr>
-          <p:cNvPr id="22" name="Text 20"/>
-          <p:cNvSpPr/>
-          <p:nvPr/>
-        </p:nvSpPr>
-        <p:spPr>
-          <a:xfrm>
-            <a:off x="8842248" y="2450592"/>
-            <a:ext cx="2313432" cy="502920"/>
-          </a:xfrm>
-          <a:prstGeom prst="rect">
-            <a:avLst/>
-          </a:prstGeom>
-          <a:noFill/>
-          <a:ln/>
-        </p:spPr>
-        <p:txBody>
-          <a:bodyPr wrap="square" lIns="0" tIns="0" rIns="0" bIns="0" rtlCol="0" anchor="ctr"/>
-          <a:lstStyle/>
-          <a:p>
-            <a:pPr indent="0" marL="0">
-              <a:buNone/>
-            </a:pPr>
-            <a:r>
-              <a:rPr lang="en-US" sz="2400" dirty="0">
-                <a:solidFill>
-                  <a:srgbClr val="C69300"/>
-                </a:solidFill>
-                <a:latin typeface="Arial" pitchFamily="34" charset="0"/>
-                <a:ea typeface="Arial" pitchFamily="34" charset="-122"/>
-                <a:cs typeface="Arial" pitchFamily="34" charset="-120"/>
-              </a:rPr>
-              <a:t>04</a:t>
-            </a:r>
-            <a:endParaRPr lang="en-US" sz="2400" dirty="0"/>
-          </a:p>
-        </p:txBody>
-      </p:sp>
-      <p:sp>
-        <p:nvSpPr>
-          <p:cNvPr id="23" name="Text 21"/>
-          <p:cNvSpPr/>
-          <p:nvPr/>
-        </p:nvSpPr>
-        <p:spPr>
-          <a:xfrm>
-            <a:off x="8842248" y="3511296"/>
-            <a:ext cx="2313432" cy="548640"/>
-          </a:xfrm>
-          <a:prstGeom prst="rect">
-            <a:avLst/>
-          </a:prstGeom>
-          <a:noFill/>
-          <a:ln/>
-        </p:spPr>
-        <p:txBody>
-          <a:bodyPr wrap="square" lIns="0" tIns="0" rIns="0" bIns="0" rtlCol="0" anchor="ctr"/>
-          <a:lstStyle/>
-          <a:p>
-            <a:pPr indent="0" marL="0">
-              <a:buNone/>
-            </a:pPr>
-            <a:r>
-              <a:rPr lang="en-US" sz="2100" b="1" dirty="0">
-                <a:solidFill>
-                  <a:srgbClr val="252621"/>
-                </a:solidFill>
-                <a:latin typeface="Arial" pitchFamily="34" charset="0"/>
-                <a:ea typeface="Arial" pitchFamily="34" charset="-122"/>
-                <a:cs typeface="Arial" pitchFamily="34" charset="-120"/>
-              </a:rPr>
-              <a:t>Deliver</a:t>
-            </a:r>
-            <a:endParaRPr lang="en-US" sz="2100" dirty="0"/>
-          </a:p>
-        </p:txBody>
-      </p:sp>
-      <p:sp>
-        <p:nvSpPr>
-          <p:cNvPr id="24" name="Text 22"/>
-          <p:cNvSpPr/>
-          <p:nvPr/>
-        </p:nvSpPr>
-        <p:spPr>
-          <a:xfrm>
-            <a:off x="8842248" y="4251960"/>
-            <a:ext cx="2313432" cy="1234440"/>
-          </a:xfrm>
-          <a:prstGeom prst="rect">
-            <a:avLst/>
-          </a:prstGeom>
-          <a:noFill/>
-          <a:ln/>
-        </p:spPr>
-        <p:txBody>
-          <a:bodyPr wrap="square" lIns="0" tIns="0" rIns="0" bIns="0" rtlCol="0" anchor="t"/>
-          <a:lstStyle/>
-          <a:p>
-            <a:pPr indent="0" marL="0">
-              <a:buNone/>
-            </a:pPr>
-            <a:r>
-              <a:rPr lang="en-US" sz="1600" dirty="0">
-                <a:solidFill>
-                  <a:srgbClr val="77796D"/>
-                </a:solidFill>
-                <a:latin typeface="Arial" pitchFamily="34" charset="0"/>
-                <a:ea typeface="Arial" pitchFamily="34" charset="-122"/>
-                <a:cs typeface="Arial" pitchFamily="34" charset="-120"/>
-              </a:rPr>
-              <a:t>Support the agreed handover.</a:t>
-            </a:r>
-            <a:endParaRPr lang="en-US" sz="1600" dirty="0"/>
-          </a:p>
-        </p:txBody>
-      </p:sp>
-    </p:spTree>
-  </p:cSld>
-  <p:clrMapOvr>
-    <a:masterClrMapping/>
-  </p:clrMapOvr>
-</p:sld>
-</file>
-
-<file path=ppt/slides/slide6.xml><?xml version="1.0" encoding="utf-8"?>
-<p:sld xmlns:a="http://schemas.openxmlformats.org/drawingml/2006/main" xmlns:r="http://schemas.openxmlformats.org/officeDocument/2006/relationships" xmlns:p="http://schemas.openxmlformats.org/presentationml/2006/main">
-  <p:cSld name="Slide 6">
-    <p:bg>
-      <p:bgPr>
-        <a:solidFill>
-          <a:srgbClr val="FAFAF7"/>
-        </a:solidFill>
-      </p:bgPr>
-    </p:bg>
-    <p:spTree>
-      <p:nvGrpSpPr>
-        <p:cNvPr id="1" name=""/>
-        <p:cNvGrpSpPr/>
-        <p:nvPr/>
-      </p:nvGrpSpPr>
-      <p:grpSpPr>
-        <a:xfrm>
-          <a:off x="0" y="0"/>
-          <a:ext cx="0" cy="0"/>
-          <a:chOff x="0" y="0"/>
-          <a:chExt cx="0" cy="0"/>
-        </a:xfrm>
-      </p:grpSpPr>
-      <p:sp>
-        <p:nvSpPr>
-          <p:cNvPr id="2" name="Text 0"/>
-          <p:cNvSpPr/>
-          <p:nvPr/>
-        </p:nvSpPr>
-        <p:spPr>
-          <a:xfrm>
-            <a:off x="594360" y="256032"/>
-            <a:ext cx="4572000" cy="228600"/>
-          </a:xfrm>
-          <a:prstGeom prst="rect">
-            <a:avLst/>
-          </a:prstGeom>
-          <a:noFill/>
-          <a:ln/>
-        </p:spPr>
-        <p:txBody>
-          <a:bodyPr wrap="square" lIns="0" tIns="0" rIns="0" bIns="0" rtlCol="0" anchor="ctr"/>
-          <a:lstStyle/>
-          <a:p>
-            <a:pPr indent="0" marL="0">
-              <a:buNone/>
-            </a:pPr>
-            <a:r>
-              <a:rPr lang="en-US" sz="1000" b="1" spc="200" kern="0" dirty="0">
-                <a:solidFill>
-                  <a:srgbClr val="77796D"/>
-                </a:solidFill>
-                <a:latin typeface="Arial" pitchFamily="34" charset="0"/>
-                <a:ea typeface="Arial" pitchFamily="34" charset="-122"/>
-                <a:cs typeface="Arial" pitchFamily="34" charset="-120"/>
-              </a:rPr>
-              <a:t>ATELIER NORTH</a:t>
-            </a:r>
-            <a:endParaRPr lang="en-US" sz="1000" dirty="0"/>
-          </a:p>
-        </p:txBody>
-      </p:sp>
-      <p:sp>
-        <p:nvSpPr>
-          <p:cNvPr id="3" name="Text 1"/>
-          <p:cNvSpPr/>
-          <p:nvPr/>
-        </p:nvSpPr>
-        <p:spPr>
-          <a:xfrm>
-            <a:off x="7772400" y="256032"/>
-            <a:ext cx="3803904" cy="228600"/>
-          </a:xfrm>
-          <a:prstGeom prst="rect">
-            <a:avLst/>
-          </a:prstGeom>
-          <a:noFill/>
-          <a:ln/>
-        </p:spPr>
-        <p:txBody>
-          <a:bodyPr wrap="square" lIns="0" tIns="0" rIns="0" bIns="0" rtlCol="0" anchor="ctr"/>
-          <a:lstStyle/>
-          <a:p>
-            <a:pPr algn="r" indent="0" marL="0">
-              <a:buNone/>
-            </a:pPr>
-            <a:endParaRPr lang="en-US" sz="900" dirty="0"/>
-          </a:p>
-        </p:txBody>
-      </p:sp>
-      <p:sp>
-        <p:nvSpPr>
-          <p:cNvPr id="4" name="Text 2"/>
-          <p:cNvSpPr/>
-          <p:nvPr/>
-        </p:nvSpPr>
-        <p:spPr>
-          <a:xfrm>
-            <a:off x="11155680" y="6373368"/>
-            <a:ext cx="429768" cy="201168"/>
-          </a:xfrm>
-          <a:prstGeom prst="rect">
-            <a:avLst/>
-          </a:prstGeom>
-          <a:noFill/>
-          <a:ln/>
-        </p:spPr>
-        <p:txBody>
-          <a:bodyPr wrap="square" lIns="0" tIns="0" rIns="0" bIns="0" rtlCol="0" anchor="ctr"/>
-          <a:lstStyle/>
-          <a:p>
-            <a:pPr algn="r" indent="0" marL="0">
-              <a:buNone/>
-            </a:pPr>
-            <a:r>
-              <a:rPr lang="en-US" sz="900" dirty="0">
-                <a:solidFill>
-                  <a:srgbClr val="77796D"/>
-                </a:solidFill>
-                <a:latin typeface="Arial" pitchFamily="34" charset="0"/>
-                <a:ea typeface="Arial" pitchFamily="34" charset="-122"/>
-                <a:cs typeface="Arial" pitchFamily="34" charset="-120"/>
-              </a:rPr>
-              <a:t>06</a:t>
-            </a:r>
-            <a:endParaRPr lang="en-US" sz="900" dirty="0"/>
-          </a:p>
-        </p:txBody>
-      </p:sp>
-      <p:sp>
-        <p:nvSpPr>
-          <p:cNvPr id="5" name="Text 3"/>
-          <p:cNvSpPr/>
-          <p:nvPr/>
-        </p:nvSpPr>
-        <p:spPr>
-          <a:xfrm>
-            <a:off x="594360" y="6336792"/>
-            <a:ext cx="10149840" cy="283464"/>
-          </a:xfrm>
-          <a:prstGeom prst="rect">
-            <a:avLst/>
-          </a:prstGeom>
-          <a:noFill/>
-          <a:ln/>
-        </p:spPr>
-        <p:txBody>
-          <a:bodyPr wrap="square" lIns="0" tIns="0" rIns="0" bIns="0" rtlCol="0" anchor="ctr"/>
-          <a:lstStyle/>
-          <a:p>
-            <a:pPr indent="0" marL="0">
-              <a:buNone/>
-            </a:pPr>
-            <a:r>
-              <a:rPr lang="en-US" sz="900" dirty="0">
-                <a:solidFill>
-                  <a:srgbClr val="77796D"/>
-                </a:solidFill>
-                <a:latin typeface="Arial" pitchFamily="34" charset="0"/>
-                <a:ea typeface="Arial" pitchFamily="34" charset="-122"/>
-                <a:cs typeface="Arial" pitchFamily="34" charset="-120"/>
-              </a:rPr>
-              <a:t>Fictional studio and illustrative data. AI-generated imagery.</a:t>
-            </a:r>
-            <a:endParaRPr lang="en-US" sz="900" dirty="0"/>
-          </a:p>
-        </p:txBody>
-      </p:sp>
-      <p:sp>
-        <p:nvSpPr>
-          <p:cNvPr id="6" name="Text 4"/>
-          <p:cNvSpPr/>
-          <p:nvPr/>
-        </p:nvSpPr>
-        <p:spPr>
-          <a:xfrm>
-            <a:off x="594360" y="758952"/>
-            <a:ext cx="10789920" cy="210312"/>
-          </a:xfrm>
-          <a:prstGeom prst="rect">
-            <a:avLst/>
-          </a:prstGeom>
-          <a:noFill/>
-          <a:ln/>
-        </p:spPr>
-        <p:txBody>
-          <a:bodyPr wrap="square" lIns="0" tIns="0" rIns="0" bIns="0" rtlCol="0" anchor="ctr"/>
-          <a:lstStyle/>
-          <a:p>
-            <a:pPr indent="0" marL="0">
-              <a:buNone/>
-            </a:pPr>
-            <a:r>
-              <a:rPr lang="en-US" sz="1000" spc="200" kern="0" dirty="0">
-                <a:solidFill>
-                  <a:srgbClr val="C69300"/>
-                </a:solidFill>
-                <a:latin typeface="Arial" pitchFamily="34" charset="0"/>
-                <a:ea typeface="Arial" pitchFamily="34" charset="-122"/>
-                <a:cs typeface="Arial" pitchFamily="34" charset="-120"/>
-              </a:rPr>
-              <a:t>STUDIO APPROACH</a:t>
-            </a:r>
-            <a:endParaRPr lang="en-US" sz="1000" dirty="0"/>
-          </a:p>
-        </p:txBody>
-      </p:sp>
-      <p:sp>
-        <p:nvSpPr>
-          <p:cNvPr id="7" name="Text 5"/>
-          <p:cNvSpPr/>
-          <p:nvPr/>
-        </p:nvSpPr>
-        <p:spPr>
-          <a:xfrm>
-            <a:off x="594360" y="1051560"/>
-            <a:ext cx="10881360" cy="594360"/>
-          </a:xfrm>
-          <a:prstGeom prst="rect">
-            <a:avLst/>
-          </a:prstGeom>
-          <a:noFill/>
-          <a:ln/>
-        </p:spPr>
-        <p:txBody>
-          <a:bodyPr wrap="square" lIns="0" tIns="0" rIns="0" bIns="0" rtlCol="0" anchor="ctr"/>
-          <a:lstStyle/>
-          <a:p>
-            <a:pPr indent="0" marL="0">
-              <a:buNone/>
-            </a:pPr>
-            <a:r>
-              <a:rPr lang="en-US" sz="3200" dirty="0">
-                <a:solidFill>
-                  <a:srgbClr val="252621"/>
-                </a:solidFill>
-                <a:latin typeface="Arial" pitchFamily="34" charset="0"/>
-                <a:ea typeface="Arial" pitchFamily="34" charset="-122"/>
-                <a:cs typeface="Arial" pitchFamily="34" charset="-120"/>
-              </a:rPr>
-              <a:t>Daylight and material warmth</a:t>
-            </a:r>
-            <a:endParaRPr lang="en-US" sz="3200" dirty="0"/>
-          </a:p>
-        </p:txBody>
-      </p:sp>
-      <p:sp>
-        <p:nvSpPr>
-          <p:cNvPr id="8" name="Shape 6"/>
-          <p:cNvSpPr/>
-          <p:nvPr/>
-        </p:nvSpPr>
-        <p:spPr>
-          <a:xfrm>
-            <a:off x="685800" y="2377440"/>
-            <a:ext cx="10789920" cy="0"/>
-          </a:xfrm>
-          <a:prstGeom prst="line">
-            <a:avLst/>
-          </a:prstGeom>
-          <a:noFill/>
-          <a:ln w="7620">
-            <a:solidFill>
-              <a:srgbClr val="DDDFD5"/>
-            </a:solidFill>
-            <a:prstDash val="solid"/>
-          </a:ln>
-        </p:spPr>
-      </p:sp>
-      <p:sp>
-        <p:nvSpPr>
-          <p:cNvPr id="9" name="Text 7"/>
-          <p:cNvSpPr/>
-          <p:nvPr/>
-        </p:nvSpPr>
-        <p:spPr>
-          <a:xfrm>
-            <a:off x="685800" y="2523744"/>
-            <a:ext cx="10789920" cy="347472"/>
-          </a:xfrm>
-          <a:prstGeom prst="rect">
-            <a:avLst/>
-          </a:prstGeom>
-          <a:noFill/>
-          <a:ln/>
-        </p:spPr>
-        <p:txBody>
-          <a:bodyPr wrap="square" lIns="0" tIns="0" rIns="0" bIns="0" rtlCol="0" anchor="ctr"/>
-          <a:lstStyle/>
-          <a:p>
-            <a:pPr indent="0" marL="0">
-              <a:buNone/>
-            </a:pPr>
-            <a:r>
-              <a:rPr lang="en-US" sz="1900" b="1" dirty="0">
-                <a:solidFill>
-                  <a:srgbClr val="252621"/>
-                </a:solidFill>
-                <a:latin typeface="Arial" pitchFamily="34" charset="0"/>
-                <a:ea typeface="Arial" pitchFamily="34" charset="-122"/>
-                <a:cs typeface="Arial" pitchFamily="34" charset="-120"/>
-              </a:rPr>
-              <a:t>Daylight</a:t>
-            </a:r>
-            <a:endParaRPr lang="en-US" sz="1900" dirty="0"/>
-          </a:p>
-        </p:txBody>
-      </p:sp>
-      <p:sp>
-        <p:nvSpPr>
-          <p:cNvPr id="10" name="Text 8"/>
-          <p:cNvSpPr/>
-          <p:nvPr/>
-        </p:nvSpPr>
-        <p:spPr>
-          <a:xfrm>
-            <a:off x="685800" y="2980944"/>
-            <a:ext cx="10789920" cy="518160"/>
-          </a:xfrm>
-          <a:prstGeom prst="rect">
-            <a:avLst/>
-          </a:prstGeom>
-          <a:noFill/>
-          <a:ln/>
-        </p:spPr>
-        <p:txBody>
-          <a:bodyPr wrap="square" lIns="0" tIns="0" rIns="0" bIns="0" rtlCol="0" anchor="t"/>
-          <a:lstStyle/>
-          <a:p>
-            <a:pPr indent="0" marL="0">
-              <a:buNone/>
-            </a:pPr>
-            <a:r>
-              <a:rPr lang="en-US" sz="1500" dirty="0">
-                <a:solidFill>
-                  <a:srgbClr val="77796D"/>
-                </a:solidFill>
-                <a:latin typeface="Arial" pitchFamily="34" charset="0"/>
-                <a:ea typeface="Arial" pitchFamily="34" charset="-122"/>
-                <a:cs typeface="Arial" pitchFamily="34" charset="-120"/>
-              </a:rPr>
-              <a:t>Let natural light shape calm workspaces.</a:t>
-            </a:r>
-            <a:endParaRPr lang="en-US" sz="1500" dirty="0"/>
-          </a:p>
-        </p:txBody>
-      </p:sp>
-      <p:sp>
-        <p:nvSpPr>
-          <p:cNvPr id="11" name="Shape 9"/>
-          <p:cNvSpPr/>
-          <p:nvPr/>
-        </p:nvSpPr>
-        <p:spPr>
-          <a:xfrm>
-            <a:off x="685800" y="3581400"/>
-            <a:ext cx="10789920" cy="0"/>
-          </a:xfrm>
-          <a:prstGeom prst="line">
-            <a:avLst/>
-          </a:prstGeom>
-          <a:noFill/>
-          <a:ln w="7620">
-            <a:solidFill>
-              <a:srgbClr val="DDDFD5"/>
-            </a:solidFill>
-            <a:prstDash val="solid"/>
-          </a:ln>
-        </p:spPr>
-      </p:sp>
-      <p:sp>
-        <p:nvSpPr>
-          <p:cNvPr id="12" name="Text 10"/>
-          <p:cNvSpPr/>
-          <p:nvPr/>
-        </p:nvSpPr>
-        <p:spPr>
-          <a:xfrm>
-            <a:off x="685800" y="3727704"/>
-            <a:ext cx="10789920" cy="347472"/>
-          </a:xfrm>
-          <a:prstGeom prst="rect">
-            <a:avLst/>
-          </a:prstGeom>
-          <a:noFill/>
-          <a:ln/>
-        </p:spPr>
-        <p:txBody>
-          <a:bodyPr wrap="square" lIns="0" tIns="0" rIns="0" bIns="0" rtlCol="0" anchor="ctr"/>
-          <a:lstStyle/>
-          <a:p>
-            <a:pPr indent="0" marL="0">
-              <a:buNone/>
-            </a:pPr>
-            <a:r>
-              <a:rPr lang="en-US" sz="1900" b="1" dirty="0">
-                <a:solidFill>
-                  <a:srgbClr val="252621"/>
-                </a:solidFill>
-                <a:latin typeface="Arial" pitchFamily="34" charset="0"/>
-                <a:ea typeface="Arial" pitchFamily="34" charset="-122"/>
-                <a:cs typeface="Arial" pitchFamily="34" charset="-120"/>
-              </a:rPr>
-              <a:t>Tactile materials</a:t>
-            </a:r>
-            <a:endParaRPr lang="en-US" sz="1900" dirty="0"/>
-          </a:p>
-        </p:txBody>
-      </p:sp>
-      <p:sp>
-        <p:nvSpPr>
-          <p:cNvPr id="13" name="Text 11"/>
-          <p:cNvSpPr/>
-          <p:nvPr/>
-        </p:nvSpPr>
-        <p:spPr>
-          <a:xfrm>
-            <a:off x="685800" y="4184904"/>
-            <a:ext cx="10789920" cy="518160"/>
-          </a:xfrm>
-          <a:prstGeom prst="rect">
-            <a:avLst/>
-          </a:prstGeom>
-          <a:noFill/>
-          <a:ln/>
-        </p:spPr>
-        <p:txBody>
-          <a:bodyPr wrap="square" lIns="0" tIns="0" rIns="0" bIns="0" rtlCol="0" anchor="t"/>
-          <a:lstStyle/>
-          <a:p>
-            <a:pPr indent="0" marL="0">
-              <a:buNone/>
-            </a:pPr>
-            <a:r>
-              <a:rPr lang="en-US" sz="1500" dirty="0">
-                <a:solidFill>
-                  <a:srgbClr val="77796D"/>
-                </a:solidFill>
-                <a:latin typeface="Arial" pitchFamily="34" charset="0"/>
-                <a:ea typeface="Arial" pitchFamily="34" charset="-122"/>
-                <a:cs typeface="Arial" pitchFamily="34" charset="-120"/>
-              </a:rPr>
-              <a:t>Use carefully chosen surfaces to give spaces warmth.</a:t>
-            </a:r>
-            <a:endParaRPr lang="en-US" sz="1500" dirty="0"/>
-          </a:p>
-        </p:txBody>
-      </p:sp>
-      <p:sp>
-        <p:nvSpPr>
-          <p:cNvPr id="14" name="Shape 12"/>
-          <p:cNvSpPr/>
-          <p:nvPr/>
-        </p:nvSpPr>
-        <p:spPr>
-          <a:xfrm>
-            <a:off x="685800" y="4785360"/>
-            <a:ext cx="10789920" cy="0"/>
-          </a:xfrm>
-          <a:prstGeom prst="line">
-            <a:avLst/>
-          </a:prstGeom>
-          <a:noFill/>
-          <a:ln w="7620">
-            <a:solidFill>
-              <a:srgbClr val="DDDFD5"/>
-            </a:solidFill>
-            <a:prstDash val="solid"/>
-          </a:ln>
-        </p:spPr>
-      </p:sp>
-      <p:sp>
-        <p:nvSpPr>
-          <p:cNvPr id="15" name="Text 13"/>
-          <p:cNvSpPr/>
-          <p:nvPr/>
-        </p:nvSpPr>
-        <p:spPr>
-          <a:xfrm>
-            <a:off x="685800" y="4931664"/>
-            <a:ext cx="10789920" cy="347472"/>
-          </a:xfrm>
-          <a:prstGeom prst="rect">
-            <a:avLst/>
-          </a:prstGeom>
-          <a:noFill/>
-          <a:ln/>
-        </p:spPr>
-        <p:txBody>
-          <a:bodyPr wrap="square" lIns="0" tIns="0" rIns="0" bIns="0" rtlCol="0" anchor="ctr"/>
-          <a:lstStyle/>
-          <a:p>
-            <a:pPr indent="0" marL="0">
-              <a:buNone/>
-            </a:pPr>
-            <a:r>
-              <a:rPr lang="en-US" sz="1900" b="1" dirty="0">
-                <a:solidFill>
-                  <a:srgbClr val="252621"/>
-                </a:solidFill>
-                <a:latin typeface="Arial" pitchFamily="34" charset="0"/>
-                <a:ea typeface="Arial" pitchFamily="34" charset="-122"/>
-                <a:cs typeface="Arial" pitchFamily="34" charset="-120"/>
-              </a:rPr>
-              <a:t>A clear floor plan</a:t>
-            </a:r>
-            <a:endParaRPr lang="en-US" sz="1900" dirty="0"/>
-          </a:p>
-        </p:txBody>
-      </p:sp>
-      <p:sp>
-        <p:nvSpPr>
-          <p:cNvPr id="16" name="Text 14"/>
-          <p:cNvSpPr/>
-          <p:nvPr/>
-        </p:nvSpPr>
-        <p:spPr>
-          <a:xfrm>
-            <a:off x="685800" y="5388864"/>
-            <a:ext cx="10789920" cy="518160"/>
-          </a:xfrm>
-          <a:prstGeom prst="rect">
-            <a:avLst/>
-          </a:prstGeom>
-          <a:noFill/>
-          <a:ln/>
-        </p:spPr>
-        <p:txBody>
-          <a:bodyPr wrap="square" lIns="0" tIns="0" rIns="0" bIns="0" rtlCol="0" anchor="t"/>
-          <a:lstStyle/>
-          <a:p>
-            <a:pPr indent="0" marL="0">
-              <a:buNone/>
-            </a:pPr>
-            <a:r>
-              <a:rPr lang="en-US" sz="1500" dirty="0">
-                <a:solidFill>
-                  <a:srgbClr val="77796D"/>
-                </a:solidFill>
-                <a:latin typeface="Arial" pitchFamily="34" charset="0"/>
-                <a:ea typeface="Arial" pitchFamily="34" charset="-122"/>
-                <a:cs typeface="Arial" pitchFamily="34" charset="-120"/>
-              </a:rPr>
-              <a:t>Give people room to move and room to breathe.</a:t>
-            </a:r>
-            <a:endParaRPr lang="en-US" sz="1500" dirty="0"/>
-          </a:p>
-        </p:txBody>
-      </p:sp>
+              <a:t>materials and a clear floor plan.</a:t>
+            </a:r>
+            <a:endParaRPr lang="en-US" sz="2300" dirty="0"/>
+          </a:p>
+        </p:txBody>
+      </p:sp>
+      <p:pic>
+        <p:nvPicPr>
+          <p:cNvPr id="7" name="Image 0" descr="/Users/heikikun/Documents/skills/ppt-design-polish/examples/yellow/assets/studio.jpg">    </p:cNvPr>
+          <p:cNvPicPr>
+            <a:picLocks noChangeAspect="1"/>
+          </p:cNvPicPr>
+          <p:nvPr/>
+        </p:nvPicPr>
+        <p:blipFill>
+          <a:blip r:embed="rId1"/>
+          <a:srcRect l="18967" r="18967" t="0" b="0"/>
+          <a:stretch/>
+        </p:blipFill>
+        <p:spPr>
+          <a:xfrm>
+            <a:off x="6172200" y="1024128"/>
+            <a:ext cx="5394960" cy="4892040"/>
+          </a:xfrm>
+          <a:prstGeom prst="rect">
+            <a:avLst/>
+          </a:prstGeom>
+        </p:spPr>
+      </p:pic>
     </p:spTree>
   </p:cSld>
   <p:clrMapOvr>
